--- a/docs/content/descriptive_stats/descriptive_stats_activity.pptx
+++ b/docs/content/descriptive_stats/descriptive_stats_activity.pptx
@@ -17,6 +17,9 @@
     <p:sldId id="265" r:id="rId11"/>
     <p:sldId id="266" r:id="rId12"/>
     <p:sldId id="267" r:id="rId13"/>
+    <p:sldId id="268" r:id="rId14"/>
+    <p:sldId id="269" r:id="rId15"/>
+    <p:sldId id="270" r:id="rId16"/>
   </p:sldIdLst>
   <p:sldSz cx="9144000" cy="5143500" type="screen16x9"/>
   <p:notesSz cx="6858000" cy="9144000"/>
@@ -3392,7 +3395,17 @@
             </a:pPr>
             <a:r>
               <a:rPr/>
-              <a:t>Part 8 · Save your summary table</a:t>
+              <a:t>Part 6b · </a:t>
+            </a:r>
+            <a:r>
+              <a:rPr>
+                <a:latin typeface="Courier"/>
+              </a:rPr>
+              <a:t>skimr</a:t>
+            </a:r>
+            <a:r>
+              <a:rPr/>
+              <a:t> — a fast full-dataset overview</a:t>
             </a:r>
           </a:p>
         </p:txBody>
@@ -3417,7 +3430,21 @@
             </a:pPr>
             <a:r>
               <a:rPr b="1"/>
-              <a:t>▶ Run this:</a:t>
+              <a:t>▶ Run this</a:t>
+            </a:r>
+            <a:r>
+              <a:rPr/>
+              <a:t> (run </a:t>
+            </a:r>
+            <a:r>
+              <a:rPr>
+                <a:latin typeface="Courier"/>
+              </a:rPr>
+              <a:t>install.packages("skimr")</a:t>
+            </a:r>
+            <a:r>
+              <a:rPr/>
+              <a:t> first, one time only, if you haven’t already):</a:t>
             </a:r>
           </a:p>
           <a:p>
@@ -3431,34 +3458,36 @@
                 </a:solidFill>
                 <a:latin typeface="Courier"/>
               </a:rPr>
-              <a:t>write_csv</a:t>
-            </a:r>
-            <a:r>
-              <a:rPr>
-                <a:solidFill>
-                  <a:srgbClr val="003B4F"/>
-                </a:solidFill>
-                <a:latin typeface="Courier"/>
-              </a:rPr>
-              <a:t>(side_stats_df, </a:t>
-            </a:r>
-            <a:r>
-              <a:rPr>
-                <a:solidFill>
-                  <a:srgbClr val="20794D"/>
-                </a:solidFill>
-                <a:latin typeface="Courier"/>
-              </a:rPr>
-              <a:t>"data/pine_needles_side_stats.csv"</a:t>
-            </a:r>
-            <a:r>
-              <a:rPr>
-                <a:solidFill>
-                  <a:srgbClr val="003B4F"/>
-                </a:solidFill>
-                <a:latin typeface="Courier"/>
-              </a:rPr>
-              <a:t>)</a:t>
+              <a:t>library</a:t>
+            </a:r>
+            <a:r>
+              <a:rPr>
+                <a:solidFill>
+                  <a:srgbClr val="003B4F"/>
+                </a:solidFill>
+                <a:latin typeface="Courier"/>
+              </a:rPr>
+              <a:t>(skimr)</a:t>
+            </a:r>
+            <a:br/>
+            <a:br/>
+            <a:r>
+              <a:rPr>
+                <a:solidFill>
+                  <a:srgbClr val="4758AB"/>
+                </a:solidFill>
+                <a:latin typeface="Courier"/>
+              </a:rPr>
+              <a:t>skim</a:t>
+            </a:r>
+            <a:r>
+              <a:rPr>
+                <a:solidFill>
+                  <a:srgbClr val="003B4F"/>
+                </a:solidFill>
+                <a:latin typeface="Courier"/>
+              </a:rPr>
+              <a:t>(pine_df)</a:t>
             </a:r>
           </a:p>
           <a:p>
@@ -3467,17 +3496,94 @@
             </a:pPr>
             <a:r>
               <a:rPr/>
-              <a:t>Check your </a:t>
-            </a:r>
-            <a:r>
-              <a:rPr>
-                <a:latin typeface="Courier"/>
-              </a:rPr>
-              <a:t>data/</a:t>
+              <a:t>✏️ </a:t>
+            </a:r>
+            <a:r>
+              <a:rPr b="1"/>
+              <a:t>Your turn:</a:t>
             </a:r>
             <a:r>
               <a:rPr/>
-              <a:t> folder — the summary table should be there.</a:t>
+              <a:t> Find </a:t>
+            </a:r>
+            <a:r>
+              <a:rPr>
+                <a:latin typeface="Courier"/>
+              </a:rPr>
+              <a:t>length_mm</a:t>
+            </a:r>
+            <a:r>
+              <a:rPr/>
+              <a:t> in the </a:t>
+            </a:r>
+            <a:r>
+              <a:rPr>
+                <a:latin typeface="Courier"/>
+              </a:rPr>
+              <a:t>skim()</a:t>
+            </a:r>
+            <a:r>
+              <a:rPr/>
+              <a:t> output. Do its mean and SD match what you calculated by hand in Parts 2 and 3? </a:t>
+            </a:r>
+            <a:r>
+              <a:rPr>
+                <a:latin typeface="Courier"/>
+              </a:rPr>
+              <a:t>Y / N</a:t>
+            </a:r>
+          </a:p>
+          <a:p>
+            <a:pPr lvl="0" indent="0" marL="0">
+              <a:buNone/>
+            </a:pPr>
+            <a:r>
+              <a:rPr/>
+              <a:t>✏️ </a:t>
+            </a:r>
+            <a:r>
+              <a:rPr b="1"/>
+              <a:t>Your turn:</a:t>
+            </a:r>
+            <a:r>
+              <a:rPr/>
+              <a:t> What does </a:t>
+            </a:r>
+            <a:r>
+              <a:rPr>
+                <a:latin typeface="Courier"/>
+              </a:rPr>
+              <a:t>skim()</a:t>
+            </a:r>
+            <a:r>
+              <a:rPr/>
+              <a:t> show you for a character column (like </a:t>
+            </a:r>
+            <a:r>
+              <a:rPr>
+                <a:latin typeface="Courier"/>
+              </a:rPr>
+              <a:t>group</a:t>
+            </a:r>
+            <a:r>
+              <a:rPr/>
+              <a:t> or </a:t>
+            </a:r>
+            <a:r>
+              <a:rPr>
+                <a:latin typeface="Courier"/>
+              </a:rPr>
+              <a:t>n_s</a:t>
+            </a:r>
+            <a:r>
+              <a:rPr/>
+              <a:t>) that it doesn’t show for a numeric one? </a:t>
+            </a:r>
+            <a:r>
+              <a:rPr>
+                <a:latin typeface="Courier"/>
+              </a:rPr>
+              <a:t>________________________</a:t>
             </a:r>
           </a:p>
         </p:txBody>
@@ -3529,7 +3635,23 @@
             </a:pPr>
             <a:r>
               <a:rPr/>
-              <a:t>Part 9 · Review and checkpoint</a:t>
+              <a:t>Part 7 · Tidy group stats — </a:t>
+            </a:r>
+            <a:r>
+              <a:rPr>
+                <a:latin typeface="Courier"/>
+              </a:rPr>
+              <a:t>group_by()</a:t>
+            </a:r>
+            <a:r>
+              <a:rPr/>
+              <a:t> + </a:t>
+            </a:r>
+            <a:r>
+              <a:rPr>
+                <a:latin typeface="Courier"/>
+              </a:rPr>
+              <a:t>summarize()</a:t>
             </a:r>
           </a:p>
         </p:txBody>
@@ -3553,92 +3675,644 @@
               <a:buNone/>
             </a:pPr>
             <a:r>
-              <a:rPr/>
-              <a:t>At this point you can:</a:t>
-            </a:r>
-          </a:p>
-          <a:p>
-            <a:pPr lvl="0"/>
-            <a:r>
-              <a:rPr/>
-              <a:t>☐ Compute mean and median, and explain when they disagree</a:t>
-            </a:r>
-          </a:p>
-          <a:p>
-            <a:pPr lvl="0"/>
-            <a:r>
-              <a:rPr/>
-              <a:t>☐ Compute variance and SD by hand from a vector</a:t>
-            </a:r>
-          </a:p>
-          <a:p>
-            <a:pPr lvl="0"/>
-            <a:r>
-              <a:rPr/>
-              <a:t>☐ Explain the </a:t>
-            </a:r>
-            <a:r>
-              <a:rPr>
-                <a:latin typeface="Courier"/>
-              </a:rPr>
-              <a:t>length()</a:t>
-            </a:r>
-            <a:r>
-              <a:rPr/>
-              <a:t> trap and fix it with </a:t>
-            </a:r>
-            <a:r>
-              <a:rPr>
-                <a:latin typeface="Courier"/>
-              </a:rPr>
-              <a:t>sum(!is.na())</a:t>
-            </a:r>
-          </a:p>
-          <a:p>
-            <a:pPr lvl="0"/>
-            <a:r>
-              <a:rPr/>
-              <a:t>☐ Compute SE and explain how it differs from SD</a:t>
-            </a:r>
-          </a:p>
-          <a:p>
-            <a:pPr lvl="0"/>
-            <a:r>
-              <a:rPr/>
-              <a:t>☐ Use </a:t>
-            </a:r>
-            <a:r>
-              <a:rPr>
-                <a:latin typeface="Courier"/>
-              </a:rPr>
-              <a:t>group_by()</a:t>
-            </a:r>
-            <a:r>
-              <a:rPr/>
-              <a:t> + </a:t>
-            </a:r>
-            <a:r>
-              <a:rPr>
-                <a:latin typeface="Courier"/>
-              </a:rPr>
-              <a:t>summarize()</a:t>
-            </a:r>
-            <a:r>
-              <a:rPr/>
-              <a:t> to get n, mean, SD, and SE for every group at once</a:t>
-            </a:r>
-          </a:p>
-          <a:p>
-            <a:pPr lvl="0"/>
-            <a:r>
-              <a:rPr/>
-              <a:t>☐ Save a summary table with </a:t>
-            </a:r>
-            <a:r>
-              <a:rPr>
-                <a:latin typeface="Courier"/>
-              </a:rPr>
-              <a:t>write_csv()</a:t>
+              <a:rPr b="1"/>
+              <a:t>▶ Run this:</a:t>
+            </a:r>
+          </a:p>
+          <a:p>
+            <a:pPr lvl="0" indent="0">
+              <a:buNone/>
+            </a:pPr>
+            <a:r>
+              <a:rPr>
+                <a:solidFill>
+                  <a:srgbClr val="003B4F"/>
+                </a:solidFill>
+                <a:latin typeface="Courier"/>
+              </a:rPr>
+              <a:t>side_stats_df &lt;- pine_df </a:t>
+            </a:r>
+            <a:r>
+              <a:rPr>
+                <a:solidFill>
+                  <a:srgbClr val="5E5E5E"/>
+                </a:solidFill>
+                <a:latin typeface="Courier"/>
+              </a:rPr>
+              <a:t>|&gt;</a:t>
+            </a:r>
+            <a:br/>
+            <a:r>
+              <a:rPr>
+                <a:solidFill>
+                  <a:srgbClr val="003B4F"/>
+                </a:solidFill>
+                <a:latin typeface="Courier"/>
+              </a:rPr>
+              <a:t>  </a:t>
+            </a:r>
+            <a:r>
+              <a:rPr>
+                <a:solidFill>
+                  <a:srgbClr val="4758AB"/>
+                </a:solidFill>
+                <a:latin typeface="Courier"/>
+              </a:rPr>
+              <a:t>group_by</a:t>
+            </a:r>
+            <a:r>
+              <a:rPr>
+                <a:solidFill>
+                  <a:srgbClr val="003B4F"/>
+                </a:solidFill>
+                <a:latin typeface="Courier"/>
+              </a:rPr>
+              <a:t>(n_s) </a:t>
+            </a:r>
+            <a:r>
+              <a:rPr>
+                <a:solidFill>
+                  <a:srgbClr val="5E5E5E"/>
+                </a:solidFill>
+                <a:latin typeface="Courier"/>
+              </a:rPr>
+              <a:t>|&gt;</a:t>
+            </a:r>
+            <a:br/>
+            <a:r>
+              <a:rPr>
+                <a:solidFill>
+                  <a:srgbClr val="003B4F"/>
+                </a:solidFill>
+                <a:latin typeface="Courier"/>
+              </a:rPr>
+              <a:t>  </a:t>
+            </a:r>
+            <a:r>
+              <a:rPr>
+                <a:solidFill>
+                  <a:srgbClr val="4758AB"/>
+                </a:solidFill>
+                <a:latin typeface="Courier"/>
+              </a:rPr>
+              <a:t>summarize</a:t>
+            </a:r>
+            <a:r>
+              <a:rPr>
+                <a:solidFill>
+                  <a:srgbClr val="003B4F"/>
+                </a:solidFill>
+                <a:latin typeface="Courier"/>
+              </a:rPr>
+              <a:t>(</a:t>
+            </a:r>
+            <a:br/>
+            <a:r>
+              <a:rPr>
+                <a:solidFill>
+                  <a:srgbClr val="003B4F"/>
+                </a:solidFill>
+                <a:latin typeface="Courier"/>
+              </a:rPr>
+              <a:t>    </a:t>
+            </a:r>
+            <a:r>
+              <a:rPr>
+                <a:solidFill>
+                  <a:srgbClr val="657422"/>
+                </a:solidFill>
+                <a:latin typeface="Courier"/>
+              </a:rPr>
+              <a:t>n       =</a:t>
+            </a:r>
+            <a:r>
+              <a:rPr>
+                <a:solidFill>
+                  <a:srgbClr val="003B4F"/>
+                </a:solidFill>
+                <a:latin typeface="Courier"/>
+              </a:rPr>
+              <a:t> </a:t>
+            </a:r>
+            <a:r>
+              <a:rPr>
+                <a:solidFill>
+                  <a:srgbClr val="4758AB"/>
+                </a:solidFill>
+                <a:latin typeface="Courier"/>
+              </a:rPr>
+              <a:t>sum</a:t>
+            </a:r>
+            <a:r>
+              <a:rPr>
+                <a:solidFill>
+                  <a:srgbClr val="003B4F"/>
+                </a:solidFill>
+                <a:latin typeface="Courier"/>
+              </a:rPr>
+              <a:t>(</a:t>
+            </a:r>
+            <a:r>
+              <a:rPr>
+                <a:solidFill>
+                  <a:srgbClr val="5E5E5E"/>
+                </a:solidFill>
+                <a:latin typeface="Courier"/>
+              </a:rPr>
+              <a:t>!</a:t>
+            </a:r>
+            <a:r>
+              <a:rPr>
+                <a:solidFill>
+                  <a:srgbClr val="4758AB"/>
+                </a:solidFill>
+                <a:latin typeface="Courier"/>
+              </a:rPr>
+              <a:t>is.na</a:t>
+            </a:r>
+            <a:r>
+              <a:rPr>
+                <a:solidFill>
+                  <a:srgbClr val="003B4F"/>
+                </a:solidFill>
+                <a:latin typeface="Courier"/>
+              </a:rPr>
+              <a:t>(length_mm)),</a:t>
+            </a:r>
+            <a:br/>
+            <a:r>
+              <a:rPr>
+                <a:solidFill>
+                  <a:srgbClr val="003B4F"/>
+                </a:solidFill>
+                <a:latin typeface="Courier"/>
+              </a:rPr>
+              <a:t>    </a:t>
+            </a:r>
+            <a:r>
+              <a:rPr>
+                <a:solidFill>
+                  <a:srgbClr val="657422"/>
+                </a:solidFill>
+                <a:latin typeface="Courier"/>
+              </a:rPr>
+              <a:t>mean_mm =</a:t>
+            </a:r>
+            <a:r>
+              <a:rPr>
+                <a:solidFill>
+                  <a:srgbClr val="003B4F"/>
+                </a:solidFill>
+                <a:latin typeface="Courier"/>
+              </a:rPr>
+              <a:t> </a:t>
+            </a:r>
+            <a:r>
+              <a:rPr>
+                <a:solidFill>
+                  <a:srgbClr val="4758AB"/>
+                </a:solidFill>
+                <a:latin typeface="Courier"/>
+              </a:rPr>
+              <a:t>round</a:t>
+            </a:r>
+            <a:r>
+              <a:rPr>
+                <a:solidFill>
+                  <a:srgbClr val="003B4F"/>
+                </a:solidFill>
+                <a:latin typeface="Courier"/>
+              </a:rPr>
+              <a:t>(</a:t>
+            </a:r>
+            <a:r>
+              <a:rPr>
+                <a:solidFill>
+                  <a:srgbClr val="4758AB"/>
+                </a:solidFill>
+                <a:latin typeface="Courier"/>
+              </a:rPr>
+              <a:t>mean</a:t>
+            </a:r>
+            <a:r>
+              <a:rPr>
+                <a:solidFill>
+                  <a:srgbClr val="003B4F"/>
+                </a:solidFill>
+                <a:latin typeface="Courier"/>
+              </a:rPr>
+              <a:t>(length_mm, </a:t>
+            </a:r>
+            <a:r>
+              <a:rPr>
+                <a:solidFill>
+                  <a:srgbClr val="657422"/>
+                </a:solidFill>
+                <a:latin typeface="Courier"/>
+              </a:rPr>
+              <a:t>na.rm =</a:t>
+            </a:r>
+            <a:r>
+              <a:rPr>
+                <a:solidFill>
+                  <a:srgbClr val="003B4F"/>
+                </a:solidFill>
+                <a:latin typeface="Courier"/>
+              </a:rPr>
+              <a:t> </a:t>
+            </a:r>
+            <a:r>
+              <a:rPr>
+                <a:solidFill>
+                  <a:srgbClr val="8F5902"/>
+                </a:solidFill>
+                <a:latin typeface="Courier"/>
+              </a:rPr>
+              <a:t>TRUE</a:t>
+            </a:r>
+            <a:r>
+              <a:rPr>
+                <a:solidFill>
+                  <a:srgbClr val="003B4F"/>
+                </a:solidFill>
+                <a:latin typeface="Courier"/>
+              </a:rPr>
+              <a:t>), </a:t>
+            </a:r>
+            <a:r>
+              <a:rPr>
+                <a:solidFill>
+                  <a:srgbClr val="AD0000"/>
+                </a:solidFill>
+                <a:latin typeface="Courier"/>
+              </a:rPr>
+              <a:t>2</a:t>
+            </a:r>
+            <a:r>
+              <a:rPr>
+                <a:solidFill>
+                  <a:srgbClr val="003B4F"/>
+                </a:solidFill>
+                <a:latin typeface="Courier"/>
+              </a:rPr>
+              <a:t>),</a:t>
+            </a:r>
+            <a:br/>
+            <a:r>
+              <a:rPr>
+                <a:solidFill>
+                  <a:srgbClr val="003B4F"/>
+                </a:solidFill>
+                <a:latin typeface="Courier"/>
+              </a:rPr>
+              <a:t>    </a:t>
+            </a:r>
+            <a:r>
+              <a:rPr>
+                <a:solidFill>
+                  <a:srgbClr val="657422"/>
+                </a:solidFill>
+                <a:latin typeface="Courier"/>
+              </a:rPr>
+              <a:t>med_mm  =</a:t>
+            </a:r>
+            <a:r>
+              <a:rPr>
+                <a:solidFill>
+                  <a:srgbClr val="003B4F"/>
+                </a:solidFill>
+                <a:latin typeface="Courier"/>
+              </a:rPr>
+              <a:t> </a:t>
+            </a:r>
+            <a:r>
+              <a:rPr>
+                <a:solidFill>
+                  <a:srgbClr val="4758AB"/>
+                </a:solidFill>
+                <a:latin typeface="Courier"/>
+              </a:rPr>
+              <a:t>round</a:t>
+            </a:r>
+            <a:r>
+              <a:rPr>
+                <a:solidFill>
+                  <a:srgbClr val="003B4F"/>
+                </a:solidFill>
+                <a:latin typeface="Courier"/>
+              </a:rPr>
+              <a:t>(</a:t>
+            </a:r>
+            <a:r>
+              <a:rPr>
+                <a:solidFill>
+                  <a:srgbClr val="4758AB"/>
+                </a:solidFill>
+                <a:latin typeface="Courier"/>
+              </a:rPr>
+              <a:t>median</a:t>
+            </a:r>
+            <a:r>
+              <a:rPr>
+                <a:solidFill>
+                  <a:srgbClr val="003B4F"/>
+                </a:solidFill>
+                <a:latin typeface="Courier"/>
+              </a:rPr>
+              <a:t>(length_mm, </a:t>
+            </a:r>
+            <a:r>
+              <a:rPr>
+                <a:solidFill>
+                  <a:srgbClr val="657422"/>
+                </a:solidFill>
+                <a:latin typeface="Courier"/>
+              </a:rPr>
+              <a:t>na.rm =</a:t>
+            </a:r>
+            <a:r>
+              <a:rPr>
+                <a:solidFill>
+                  <a:srgbClr val="003B4F"/>
+                </a:solidFill>
+                <a:latin typeface="Courier"/>
+              </a:rPr>
+              <a:t> </a:t>
+            </a:r>
+            <a:r>
+              <a:rPr>
+                <a:solidFill>
+                  <a:srgbClr val="8F5902"/>
+                </a:solidFill>
+                <a:latin typeface="Courier"/>
+              </a:rPr>
+              <a:t>TRUE</a:t>
+            </a:r>
+            <a:r>
+              <a:rPr>
+                <a:solidFill>
+                  <a:srgbClr val="003B4F"/>
+                </a:solidFill>
+                <a:latin typeface="Courier"/>
+              </a:rPr>
+              <a:t>), </a:t>
+            </a:r>
+            <a:r>
+              <a:rPr>
+                <a:solidFill>
+                  <a:srgbClr val="AD0000"/>
+                </a:solidFill>
+                <a:latin typeface="Courier"/>
+              </a:rPr>
+              <a:t>2</a:t>
+            </a:r>
+            <a:r>
+              <a:rPr>
+                <a:solidFill>
+                  <a:srgbClr val="003B4F"/>
+                </a:solidFill>
+                <a:latin typeface="Courier"/>
+              </a:rPr>
+              <a:t>),</a:t>
+            </a:r>
+            <a:br/>
+            <a:r>
+              <a:rPr>
+                <a:solidFill>
+                  <a:srgbClr val="003B4F"/>
+                </a:solidFill>
+                <a:latin typeface="Courier"/>
+              </a:rPr>
+              <a:t>    </a:t>
+            </a:r>
+            <a:r>
+              <a:rPr>
+                <a:solidFill>
+                  <a:srgbClr val="657422"/>
+                </a:solidFill>
+                <a:latin typeface="Courier"/>
+              </a:rPr>
+              <a:t>sd_mm   =</a:t>
+            </a:r>
+            <a:r>
+              <a:rPr>
+                <a:solidFill>
+                  <a:srgbClr val="003B4F"/>
+                </a:solidFill>
+                <a:latin typeface="Courier"/>
+              </a:rPr>
+              <a:t> </a:t>
+            </a:r>
+            <a:r>
+              <a:rPr>
+                <a:solidFill>
+                  <a:srgbClr val="4758AB"/>
+                </a:solidFill>
+                <a:latin typeface="Courier"/>
+              </a:rPr>
+              <a:t>round</a:t>
+            </a:r>
+            <a:r>
+              <a:rPr>
+                <a:solidFill>
+                  <a:srgbClr val="003B4F"/>
+                </a:solidFill>
+                <a:latin typeface="Courier"/>
+              </a:rPr>
+              <a:t>(</a:t>
+            </a:r>
+            <a:r>
+              <a:rPr>
+                <a:solidFill>
+                  <a:srgbClr val="4758AB"/>
+                </a:solidFill>
+                <a:latin typeface="Courier"/>
+              </a:rPr>
+              <a:t>sd</a:t>
+            </a:r>
+            <a:r>
+              <a:rPr>
+                <a:solidFill>
+                  <a:srgbClr val="003B4F"/>
+                </a:solidFill>
+                <a:latin typeface="Courier"/>
+              </a:rPr>
+              <a:t>(length_mm, </a:t>
+            </a:r>
+            <a:r>
+              <a:rPr>
+                <a:solidFill>
+                  <a:srgbClr val="657422"/>
+                </a:solidFill>
+                <a:latin typeface="Courier"/>
+              </a:rPr>
+              <a:t>na.rm =</a:t>
+            </a:r>
+            <a:r>
+              <a:rPr>
+                <a:solidFill>
+                  <a:srgbClr val="003B4F"/>
+                </a:solidFill>
+                <a:latin typeface="Courier"/>
+              </a:rPr>
+              <a:t> </a:t>
+            </a:r>
+            <a:r>
+              <a:rPr>
+                <a:solidFill>
+                  <a:srgbClr val="8F5902"/>
+                </a:solidFill>
+                <a:latin typeface="Courier"/>
+              </a:rPr>
+              <a:t>TRUE</a:t>
+            </a:r>
+            <a:r>
+              <a:rPr>
+                <a:solidFill>
+                  <a:srgbClr val="003B4F"/>
+                </a:solidFill>
+                <a:latin typeface="Courier"/>
+              </a:rPr>
+              <a:t>), </a:t>
+            </a:r>
+            <a:r>
+              <a:rPr>
+                <a:solidFill>
+                  <a:srgbClr val="AD0000"/>
+                </a:solidFill>
+                <a:latin typeface="Courier"/>
+              </a:rPr>
+              <a:t>2</a:t>
+            </a:r>
+            <a:r>
+              <a:rPr>
+                <a:solidFill>
+                  <a:srgbClr val="003B4F"/>
+                </a:solidFill>
+                <a:latin typeface="Courier"/>
+              </a:rPr>
+              <a:t>),</a:t>
+            </a:r>
+            <a:br/>
+            <a:r>
+              <a:rPr>
+                <a:solidFill>
+                  <a:srgbClr val="003B4F"/>
+                </a:solidFill>
+                <a:latin typeface="Courier"/>
+              </a:rPr>
+              <a:t>    </a:t>
+            </a:r>
+            <a:r>
+              <a:rPr>
+                <a:solidFill>
+                  <a:srgbClr val="657422"/>
+                </a:solidFill>
+                <a:latin typeface="Courier"/>
+              </a:rPr>
+              <a:t>se_mm   =</a:t>
+            </a:r>
+            <a:r>
+              <a:rPr>
+                <a:solidFill>
+                  <a:srgbClr val="003B4F"/>
+                </a:solidFill>
+                <a:latin typeface="Courier"/>
+              </a:rPr>
+              <a:t> </a:t>
+            </a:r>
+            <a:r>
+              <a:rPr>
+                <a:solidFill>
+                  <a:srgbClr val="4758AB"/>
+                </a:solidFill>
+                <a:latin typeface="Courier"/>
+              </a:rPr>
+              <a:t>round</a:t>
+            </a:r>
+            <a:r>
+              <a:rPr>
+                <a:solidFill>
+                  <a:srgbClr val="003B4F"/>
+                </a:solidFill>
+                <a:latin typeface="Courier"/>
+              </a:rPr>
+              <a:t>(sd_mm </a:t>
+            </a:r>
+            <a:r>
+              <a:rPr>
+                <a:solidFill>
+                  <a:srgbClr val="5E5E5E"/>
+                </a:solidFill>
+                <a:latin typeface="Courier"/>
+              </a:rPr>
+              <a:t>/</a:t>
+            </a:r>
+            <a:r>
+              <a:rPr>
+                <a:solidFill>
+                  <a:srgbClr val="003B4F"/>
+                </a:solidFill>
+                <a:latin typeface="Courier"/>
+              </a:rPr>
+              <a:t> </a:t>
+            </a:r>
+            <a:r>
+              <a:rPr>
+                <a:solidFill>
+                  <a:srgbClr val="4758AB"/>
+                </a:solidFill>
+                <a:latin typeface="Courier"/>
+              </a:rPr>
+              <a:t>sqrt</a:t>
+            </a:r>
+            <a:r>
+              <a:rPr>
+                <a:solidFill>
+                  <a:srgbClr val="003B4F"/>
+                </a:solidFill>
+                <a:latin typeface="Courier"/>
+              </a:rPr>
+              <a:t>(n), </a:t>
+            </a:r>
+            <a:r>
+              <a:rPr>
+                <a:solidFill>
+                  <a:srgbClr val="AD0000"/>
+                </a:solidFill>
+                <a:latin typeface="Courier"/>
+              </a:rPr>
+              <a:t>2</a:t>
+            </a:r>
+            <a:r>
+              <a:rPr>
+                <a:solidFill>
+                  <a:srgbClr val="003B4F"/>
+                </a:solidFill>
+                <a:latin typeface="Courier"/>
+              </a:rPr>
+              <a:t>)</a:t>
+            </a:r>
+            <a:br/>
+            <a:r>
+              <a:rPr>
+                <a:solidFill>
+                  <a:srgbClr val="003B4F"/>
+                </a:solidFill>
+                <a:latin typeface="Courier"/>
+              </a:rPr>
+              <a:t>  )</a:t>
+            </a:r>
+            <a:br/>
+            <a:br/>
+            <a:r>
+              <a:rPr>
+                <a:solidFill>
+                  <a:srgbClr val="003B4F"/>
+                </a:solidFill>
+                <a:latin typeface="Courier"/>
+              </a:rPr>
+              <a:t>side_stats_df</a:t>
             </a:r>
           </a:p>
           <a:p>
@@ -3651,11 +4325,31 @@
             </a:r>
             <a:r>
               <a:rPr b="1"/>
-              <a:t>Your turn — before you move on:</a:t>
+              <a:t>Your turn:</a:t>
             </a:r>
             <a:r>
               <a:rPr/>
-              <a:t> Run your whole script top to bottom. Ran cleanly? </a:t>
+              <a:t> Do the </a:t>
+            </a:r>
+            <a:r>
+              <a:rPr>
+                <a:latin typeface="Courier"/>
+              </a:rPr>
+              <a:t>mean_mm</a:t>
+            </a:r>
+            <a:r>
+              <a:rPr/>
+              <a:t> and </a:t>
+            </a:r>
+            <a:r>
+              <a:rPr>
+                <a:latin typeface="Courier"/>
+              </a:rPr>
+              <a:t>se_mm</a:t>
+            </a:r>
+            <a:r>
+              <a:rPr/>
+              <a:t> values match the ones you calculated by hand in Parts 2 and 5? </a:t>
             </a:r>
             <a:r>
               <a:rPr>
@@ -3663,15 +4357,56 @@
               </a:rPr>
               <a:t>Y / N</a:t>
             </a:r>
+          </a:p>
+          <a:p>
+            <a:pPr lvl="0" indent="0" marL="0">
+              <a:buNone/>
+            </a:pPr>
             <a:r>
               <a:rPr/>
-              <a:t> — if not, the error was: </a:t>
-            </a:r>
-            <a:r>
-              <a:rPr>
-                <a:latin typeface="Courier"/>
-              </a:rPr>
-              <a:t>________________________</a:t>
+              <a:t>✏️ </a:t>
+            </a:r>
+            <a:r>
+              <a:rPr b="1"/>
+              <a:t>Your turn:</a:t>
+            </a:r>
+            <a:r>
+              <a:rPr/>
+              <a:t> Now group by </a:t>
+            </a:r>
+            <a:r>
+              <a:rPr>
+                <a:latin typeface="Courier"/>
+              </a:rPr>
+              <a:t>group</a:t>
+            </a:r>
+            <a:r>
+              <a:rPr/>
+              <a:t> (the field team) instead of </a:t>
+            </a:r>
+            <a:r>
+              <a:rPr>
+                <a:latin typeface="Courier"/>
+              </a:rPr>
+              <a:t>n_s</a:t>
+            </a:r>
+            <a:r>
+              <a:rPr/>
+              <a:t>, and compute the same five statistics.</a:t>
+            </a:r>
+          </a:p>
+          <a:p>
+            <a:pPr lvl="0" indent="0">
+              <a:buNone/>
+            </a:pPr>
+            <a:r>
+              <a:rPr>
+                <a:solidFill>
+                  <a:srgbClr val="5E5E5E"/>
+                </a:solidFill>
+                <a:latin typeface="Courier"/>
+              </a:rPr>
+              <a:t># Write your code here:</a:t>
             </a:r>
           </a:p>
           <a:p>
@@ -3680,7 +4415,7 @@
             </a:pPr>
             <a:r>
               <a:rPr sz="2000" b="1"/>
-              <a:t>Note</a:t>
+              <a:t>Tip</a:t>
             </a:r>
           </a:p>
           <a:p>
@@ -3689,54 +4424,49 @@
             </a:pPr>
             <a:r>
               <a:rPr sz="2000" b="1"/>
-              <a:t>📤 What to turn in before next class</a:t>
-            </a:r>
-          </a:p>
-          <a:p>
-            <a:pPr lvl="0" indent="0" marL="1270000">
-              <a:buNone/>
-            </a:pPr>
+              <a:t>🚀 If you finish early:</a:t>
+            </a:r>
             <a:r>
               <a:rPr sz="2000"/>
-              <a:t>Upload both of these to the course management system:</a:t>
-            </a:r>
-          </a:p>
-          <a:p>
-            <a:pPr lvl="0" indent="-342900" marL="342900">
-              <a:buAutoNum type="arabicPeriod"/>
-            </a:pPr>
+              <a:t> Group by </a:t>
+            </a:r>
+            <a:r>
+              <a:rPr sz="2000" i="1"/>
+              <a:t>both</a:t>
+            </a:r>
             <a:r>
               <a:rPr sz="2000"/>
-              <a:t>Your code — the </a:t>
+              <a:t> </a:t>
             </a:r>
             <a:r>
               <a:rPr sz="2000">
                 <a:latin typeface="Courier"/>
               </a:rPr>
-              <a:t>scripts/</a:t>
+              <a:t>group</a:t>
             </a:r>
             <a:r>
               <a:rPr sz="2000"/>
-              <a:t> folder (or just </a:t>
+              <a:t> and </a:t>
             </a:r>
             <a:r>
               <a:rPr sz="2000">
                 <a:latin typeface="Courier"/>
               </a:rPr>
-              <a:t>03_descriptive_stats.R</a:t>
+              <a:t>n_s</a:t>
             </a:r>
             <a:r>
               <a:rPr sz="2000"/>
-              <a:t>)</a:t>
-            </a:r>
-          </a:p>
-          <a:p>
-            <a:pPr lvl="0" indent="-342900" marL="342900">
-              <a:buAutoNum type="arabicPeriod"/>
-            </a:pPr>
+              <a:t> at once (</a:t>
+            </a:r>
+            <a:r>
+              <a:rPr sz="2000">
+                <a:latin typeface="Courier"/>
+              </a:rPr>
+              <a:t>group_by(group, n_s)</a:t>
+            </a:r>
             <a:r>
               <a:rPr sz="2000"/>
-              <a:t>This worksheet, with your written answers</a:t>
+              <a:t>). How many rows does the result have, and why?</a:t>
             </a:r>
           </a:p>
         </p:txBody>
@@ -3788,6 +4518,1338 @@
             </a:pPr>
             <a:r>
               <a:rPr/>
+              <a:t>Part 7b · Bringing back </a:t>
+            </a:r>
+            <a:r>
+              <a:rPr>
+                <a:latin typeface="Courier"/>
+              </a:rPr>
+              <a:t>case_when()</a:t>
+            </a:r>
+            <a:r>
+              <a:rPr/>
+              <a:t> from Module 2</a:t>
+            </a:r>
+          </a:p>
+        </p:txBody>
+      </p:sp>
+      <p:sp>
+        <p:nvSpPr>
+          <p:cNvPr id="3" name="Content Placeholder 2"/>
+          <p:cNvSpPr>
+            <a:spLocks noGrp="1"/>
+          </p:cNvSpPr>
+          <p:nvPr>
+            <p:ph idx="1"/>
+          </p:nvPr>
+        </p:nvSpPr>
+        <p:spPr/>
+        <p:txBody>
+          <a:bodyPr/>
+          <a:lstStyle/>
+          <a:p>
+            <a:pPr lvl="0" indent="0" marL="0">
+              <a:buNone/>
+            </a:pPr>
+            <a:r>
+              <a:rPr b="1"/>
+              <a:t>▶ Run this:</a:t>
+            </a:r>
+          </a:p>
+          <a:p>
+            <a:pPr lvl="0" indent="0">
+              <a:buNone/>
+            </a:pPr>
+            <a:r>
+              <a:rPr>
+                <a:solidFill>
+                  <a:srgbClr val="003B4F"/>
+                </a:solidFill>
+                <a:latin typeface="Courier"/>
+              </a:rPr>
+              <a:t>size_class_stats_df &lt;- pine_df </a:t>
+            </a:r>
+            <a:r>
+              <a:rPr>
+                <a:solidFill>
+                  <a:srgbClr val="5E5E5E"/>
+                </a:solidFill>
+                <a:latin typeface="Courier"/>
+              </a:rPr>
+              <a:t>|&gt;</a:t>
+            </a:r>
+            <a:br/>
+            <a:r>
+              <a:rPr>
+                <a:solidFill>
+                  <a:srgbClr val="003B4F"/>
+                </a:solidFill>
+                <a:latin typeface="Courier"/>
+              </a:rPr>
+              <a:t>  </a:t>
+            </a:r>
+            <a:r>
+              <a:rPr>
+                <a:solidFill>
+                  <a:srgbClr val="4758AB"/>
+                </a:solidFill>
+                <a:latin typeface="Courier"/>
+              </a:rPr>
+              <a:t>mutate</a:t>
+            </a:r>
+            <a:r>
+              <a:rPr>
+                <a:solidFill>
+                  <a:srgbClr val="003B4F"/>
+                </a:solidFill>
+                <a:latin typeface="Courier"/>
+              </a:rPr>
+              <a:t>(</a:t>
+            </a:r>
+            <a:br/>
+            <a:r>
+              <a:rPr>
+                <a:solidFill>
+                  <a:srgbClr val="003B4F"/>
+                </a:solidFill>
+                <a:latin typeface="Courier"/>
+              </a:rPr>
+              <a:t>    </a:t>
+            </a:r>
+            <a:r>
+              <a:rPr>
+                <a:solidFill>
+                  <a:srgbClr val="657422"/>
+                </a:solidFill>
+                <a:latin typeface="Courier"/>
+              </a:rPr>
+              <a:t>size_class =</a:t>
+            </a:r>
+            <a:r>
+              <a:rPr>
+                <a:solidFill>
+                  <a:srgbClr val="003B4F"/>
+                </a:solidFill>
+                <a:latin typeface="Courier"/>
+              </a:rPr>
+              <a:t> </a:t>
+            </a:r>
+            <a:r>
+              <a:rPr>
+                <a:solidFill>
+                  <a:srgbClr val="4758AB"/>
+                </a:solidFill>
+                <a:latin typeface="Courier"/>
+              </a:rPr>
+              <a:t>case_when</a:t>
+            </a:r>
+            <a:r>
+              <a:rPr>
+                <a:solidFill>
+                  <a:srgbClr val="003B4F"/>
+                </a:solidFill>
+                <a:latin typeface="Courier"/>
+              </a:rPr>
+              <a:t>(</a:t>
+            </a:r>
+            <a:br/>
+            <a:r>
+              <a:rPr>
+                <a:solidFill>
+                  <a:srgbClr val="003B4F"/>
+                </a:solidFill>
+                <a:latin typeface="Courier"/>
+              </a:rPr>
+              <a:t>      length_mm </a:t>
+            </a:r>
+            <a:r>
+              <a:rPr>
+                <a:solidFill>
+                  <a:srgbClr val="5E5E5E"/>
+                </a:solidFill>
+                <a:latin typeface="Courier"/>
+              </a:rPr>
+              <a:t>&lt;</a:t>
+            </a:r>
+            <a:r>
+              <a:rPr>
+                <a:solidFill>
+                  <a:srgbClr val="003B4F"/>
+                </a:solidFill>
+                <a:latin typeface="Courier"/>
+              </a:rPr>
+              <a:t> </a:t>
+            </a:r>
+            <a:r>
+              <a:rPr>
+                <a:solidFill>
+                  <a:srgbClr val="AD0000"/>
+                </a:solidFill>
+                <a:latin typeface="Courier"/>
+              </a:rPr>
+              <a:t>16</a:t>
+            </a:r>
+            <a:r>
+              <a:rPr>
+                <a:solidFill>
+                  <a:srgbClr val="003B4F"/>
+                </a:solidFill>
+                <a:latin typeface="Courier"/>
+              </a:rPr>
+              <a:t> </a:t>
+            </a:r>
+            <a:r>
+              <a:rPr>
+                <a:solidFill>
+                  <a:srgbClr val="5E5E5E"/>
+                </a:solidFill>
+                <a:latin typeface="Courier"/>
+              </a:rPr>
+              <a:t>~</a:t>
+            </a:r>
+            <a:r>
+              <a:rPr>
+                <a:solidFill>
+                  <a:srgbClr val="003B4F"/>
+                </a:solidFill>
+                <a:latin typeface="Courier"/>
+              </a:rPr>
+              <a:t> </a:t>
+            </a:r>
+            <a:r>
+              <a:rPr>
+                <a:solidFill>
+                  <a:srgbClr val="20794D"/>
+                </a:solidFill>
+                <a:latin typeface="Courier"/>
+              </a:rPr>
+              <a:t>"short"</a:t>
+            </a:r>
+            <a:r>
+              <a:rPr>
+                <a:solidFill>
+                  <a:srgbClr val="003B4F"/>
+                </a:solidFill>
+                <a:latin typeface="Courier"/>
+              </a:rPr>
+              <a:t>,</a:t>
+            </a:r>
+            <a:br/>
+            <a:r>
+              <a:rPr>
+                <a:solidFill>
+                  <a:srgbClr val="003B4F"/>
+                </a:solidFill>
+                <a:latin typeface="Courier"/>
+              </a:rPr>
+              <a:t>      length_mm </a:t>
+            </a:r>
+            <a:r>
+              <a:rPr>
+                <a:solidFill>
+                  <a:srgbClr val="5E5E5E"/>
+                </a:solidFill>
+                <a:latin typeface="Courier"/>
+              </a:rPr>
+              <a:t>&lt;</a:t>
+            </a:r>
+            <a:r>
+              <a:rPr>
+                <a:solidFill>
+                  <a:srgbClr val="003B4F"/>
+                </a:solidFill>
+                <a:latin typeface="Courier"/>
+              </a:rPr>
+              <a:t> </a:t>
+            </a:r>
+            <a:r>
+              <a:rPr>
+                <a:solidFill>
+                  <a:srgbClr val="AD0000"/>
+                </a:solidFill>
+                <a:latin typeface="Courier"/>
+              </a:rPr>
+              <a:t>20</a:t>
+            </a:r>
+            <a:r>
+              <a:rPr>
+                <a:solidFill>
+                  <a:srgbClr val="003B4F"/>
+                </a:solidFill>
+                <a:latin typeface="Courier"/>
+              </a:rPr>
+              <a:t> </a:t>
+            </a:r>
+            <a:r>
+              <a:rPr>
+                <a:solidFill>
+                  <a:srgbClr val="5E5E5E"/>
+                </a:solidFill>
+                <a:latin typeface="Courier"/>
+              </a:rPr>
+              <a:t>~</a:t>
+            </a:r>
+            <a:r>
+              <a:rPr>
+                <a:solidFill>
+                  <a:srgbClr val="003B4F"/>
+                </a:solidFill>
+                <a:latin typeface="Courier"/>
+              </a:rPr>
+              <a:t> </a:t>
+            </a:r>
+            <a:r>
+              <a:rPr>
+                <a:solidFill>
+                  <a:srgbClr val="20794D"/>
+                </a:solidFill>
+                <a:latin typeface="Courier"/>
+              </a:rPr>
+              <a:t>"medium"</a:t>
+            </a:r>
+            <a:r>
+              <a:rPr>
+                <a:solidFill>
+                  <a:srgbClr val="003B4F"/>
+                </a:solidFill>
+                <a:latin typeface="Courier"/>
+              </a:rPr>
+              <a:t>,</a:t>
+            </a:r>
+            <a:br/>
+            <a:r>
+              <a:rPr>
+                <a:solidFill>
+                  <a:srgbClr val="003B4F"/>
+                </a:solidFill>
+                <a:latin typeface="Courier"/>
+              </a:rPr>
+              <a:t>      </a:t>
+            </a:r>
+            <a:r>
+              <a:rPr>
+                <a:solidFill>
+                  <a:srgbClr val="8F5902"/>
+                </a:solidFill>
+                <a:latin typeface="Courier"/>
+              </a:rPr>
+              <a:t>TRUE</a:t>
+            </a:r>
+            <a:r>
+              <a:rPr>
+                <a:solidFill>
+                  <a:srgbClr val="003B4F"/>
+                </a:solidFill>
+                <a:latin typeface="Courier"/>
+              </a:rPr>
+              <a:t>           </a:t>
+            </a:r>
+            <a:r>
+              <a:rPr>
+                <a:solidFill>
+                  <a:srgbClr val="5E5E5E"/>
+                </a:solidFill>
+                <a:latin typeface="Courier"/>
+              </a:rPr>
+              <a:t>~</a:t>
+            </a:r>
+            <a:r>
+              <a:rPr>
+                <a:solidFill>
+                  <a:srgbClr val="003B4F"/>
+                </a:solidFill>
+                <a:latin typeface="Courier"/>
+              </a:rPr>
+              <a:t> </a:t>
+            </a:r>
+            <a:r>
+              <a:rPr>
+                <a:solidFill>
+                  <a:srgbClr val="20794D"/>
+                </a:solidFill>
+                <a:latin typeface="Courier"/>
+              </a:rPr>
+              <a:t>"long"</a:t>
+            </a:r>
+            <a:br/>
+            <a:r>
+              <a:rPr>
+                <a:solidFill>
+                  <a:srgbClr val="003B4F"/>
+                </a:solidFill>
+                <a:latin typeface="Courier"/>
+              </a:rPr>
+              <a:t>    )</a:t>
+            </a:r>
+            <a:br/>
+            <a:r>
+              <a:rPr>
+                <a:solidFill>
+                  <a:srgbClr val="003B4F"/>
+                </a:solidFill>
+                <a:latin typeface="Courier"/>
+              </a:rPr>
+              <a:t>  ) </a:t>
+            </a:r>
+            <a:r>
+              <a:rPr>
+                <a:solidFill>
+                  <a:srgbClr val="5E5E5E"/>
+                </a:solidFill>
+                <a:latin typeface="Courier"/>
+              </a:rPr>
+              <a:t>|&gt;</a:t>
+            </a:r>
+            <a:br/>
+            <a:r>
+              <a:rPr>
+                <a:solidFill>
+                  <a:srgbClr val="003B4F"/>
+                </a:solidFill>
+                <a:latin typeface="Courier"/>
+              </a:rPr>
+              <a:t>  </a:t>
+            </a:r>
+            <a:r>
+              <a:rPr>
+                <a:solidFill>
+                  <a:srgbClr val="4758AB"/>
+                </a:solidFill>
+                <a:latin typeface="Courier"/>
+              </a:rPr>
+              <a:t>group_by</a:t>
+            </a:r>
+            <a:r>
+              <a:rPr>
+                <a:solidFill>
+                  <a:srgbClr val="003B4F"/>
+                </a:solidFill>
+                <a:latin typeface="Courier"/>
+              </a:rPr>
+              <a:t>(size_class) </a:t>
+            </a:r>
+            <a:r>
+              <a:rPr>
+                <a:solidFill>
+                  <a:srgbClr val="5E5E5E"/>
+                </a:solidFill>
+                <a:latin typeface="Courier"/>
+              </a:rPr>
+              <a:t>|&gt;</a:t>
+            </a:r>
+            <a:br/>
+            <a:r>
+              <a:rPr>
+                <a:solidFill>
+                  <a:srgbClr val="003B4F"/>
+                </a:solidFill>
+                <a:latin typeface="Courier"/>
+              </a:rPr>
+              <a:t>  </a:t>
+            </a:r>
+            <a:r>
+              <a:rPr>
+                <a:solidFill>
+                  <a:srgbClr val="4758AB"/>
+                </a:solidFill>
+                <a:latin typeface="Courier"/>
+              </a:rPr>
+              <a:t>summarize</a:t>
+            </a:r>
+            <a:r>
+              <a:rPr>
+                <a:solidFill>
+                  <a:srgbClr val="003B4F"/>
+                </a:solidFill>
+                <a:latin typeface="Courier"/>
+              </a:rPr>
+              <a:t>(</a:t>
+            </a:r>
+            <a:br/>
+            <a:r>
+              <a:rPr>
+                <a:solidFill>
+                  <a:srgbClr val="003B4F"/>
+                </a:solidFill>
+                <a:latin typeface="Courier"/>
+              </a:rPr>
+              <a:t>    </a:t>
+            </a:r>
+            <a:r>
+              <a:rPr>
+                <a:solidFill>
+                  <a:srgbClr val="657422"/>
+                </a:solidFill>
+                <a:latin typeface="Courier"/>
+              </a:rPr>
+              <a:t>n       =</a:t>
+            </a:r>
+            <a:r>
+              <a:rPr>
+                <a:solidFill>
+                  <a:srgbClr val="003B4F"/>
+                </a:solidFill>
+                <a:latin typeface="Courier"/>
+              </a:rPr>
+              <a:t> </a:t>
+            </a:r>
+            <a:r>
+              <a:rPr>
+                <a:solidFill>
+                  <a:srgbClr val="4758AB"/>
+                </a:solidFill>
+                <a:latin typeface="Courier"/>
+              </a:rPr>
+              <a:t>sum</a:t>
+            </a:r>
+            <a:r>
+              <a:rPr>
+                <a:solidFill>
+                  <a:srgbClr val="003B4F"/>
+                </a:solidFill>
+                <a:latin typeface="Courier"/>
+              </a:rPr>
+              <a:t>(</a:t>
+            </a:r>
+            <a:r>
+              <a:rPr>
+                <a:solidFill>
+                  <a:srgbClr val="5E5E5E"/>
+                </a:solidFill>
+                <a:latin typeface="Courier"/>
+              </a:rPr>
+              <a:t>!</a:t>
+            </a:r>
+            <a:r>
+              <a:rPr>
+                <a:solidFill>
+                  <a:srgbClr val="4758AB"/>
+                </a:solidFill>
+                <a:latin typeface="Courier"/>
+              </a:rPr>
+              <a:t>is.na</a:t>
+            </a:r>
+            <a:r>
+              <a:rPr>
+                <a:solidFill>
+                  <a:srgbClr val="003B4F"/>
+                </a:solidFill>
+                <a:latin typeface="Courier"/>
+              </a:rPr>
+              <a:t>(length_mm)),</a:t>
+            </a:r>
+            <a:br/>
+            <a:r>
+              <a:rPr>
+                <a:solidFill>
+                  <a:srgbClr val="003B4F"/>
+                </a:solidFill>
+                <a:latin typeface="Courier"/>
+              </a:rPr>
+              <a:t>    </a:t>
+            </a:r>
+            <a:r>
+              <a:rPr>
+                <a:solidFill>
+                  <a:srgbClr val="657422"/>
+                </a:solidFill>
+                <a:latin typeface="Courier"/>
+              </a:rPr>
+              <a:t>mean_mm =</a:t>
+            </a:r>
+            <a:r>
+              <a:rPr>
+                <a:solidFill>
+                  <a:srgbClr val="003B4F"/>
+                </a:solidFill>
+                <a:latin typeface="Courier"/>
+              </a:rPr>
+              <a:t> </a:t>
+            </a:r>
+            <a:r>
+              <a:rPr>
+                <a:solidFill>
+                  <a:srgbClr val="4758AB"/>
+                </a:solidFill>
+                <a:latin typeface="Courier"/>
+              </a:rPr>
+              <a:t>round</a:t>
+            </a:r>
+            <a:r>
+              <a:rPr>
+                <a:solidFill>
+                  <a:srgbClr val="003B4F"/>
+                </a:solidFill>
+                <a:latin typeface="Courier"/>
+              </a:rPr>
+              <a:t>(</a:t>
+            </a:r>
+            <a:r>
+              <a:rPr>
+                <a:solidFill>
+                  <a:srgbClr val="4758AB"/>
+                </a:solidFill>
+                <a:latin typeface="Courier"/>
+              </a:rPr>
+              <a:t>mean</a:t>
+            </a:r>
+            <a:r>
+              <a:rPr>
+                <a:solidFill>
+                  <a:srgbClr val="003B4F"/>
+                </a:solidFill>
+                <a:latin typeface="Courier"/>
+              </a:rPr>
+              <a:t>(length_mm, </a:t>
+            </a:r>
+            <a:r>
+              <a:rPr>
+                <a:solidFill>
+                  <a:srgbClr val="657422"/>
+                </a:solidFill>
+                <a:latin typeface="Courier"/>
+              </a:rPr>
+              <a:t>na.rm =</a:t>
+            </a:r>
+            <a:r>
+              <a:rPr>
+                <a:solidFill>
+                  <a:srgbClr val="003B4F"/>
+                </a:solidFill>
+                <a:latin typeface="Courier"/>
+              </a:rPr>
+              <a:t> </a:t>
+            </a:r>
+            <a:r>
+              <a:rPr>
+                <a:solidFill>
+                  <a:srgbClr val="8F5902"/>
+                </a:solidFill>
+                <a:latin typeface="Courier"/>
+              </a:rPr>
+              <a:t>TRUE</a:t>
+            </a:r>
+            <a:r>
+              <a:rPr>
+                <a:solidFill>
+                  <a:srgbClr val="003B4F"/>
+                </a:solidFill>
+                <a:latin typeface="Courier"/>
+              </a:rPr>
+              <a:t>), </a:t>
+            </a:r>
+            <a:r>
+              <a:rPr>
+                <a:solidFill>
+                  <a:srgbClr val="AD0000"/>
+                </a:solidFill>
+                <a:latin typeface="Courier"/>
+              </a:rPr>
+              <a:t>2</a:t>
+            </a:r>
+            <a:r>
+              <a:rPr>
+                <a:solidFill>
+                  <a:srgbClr val="003B4F"/>
+                </a:solidFill>
+                <a:latin typeface="Courier"/>
+              </a:rPr>
+              <a:t>),</a:t>
+            </a:r>
+            <a:br/>
+            <a:r>
+              <a:rPr>
+                <a:solidFill>
+                  <a:srgbClr val="003B4F"/>
+                </a:solidFill>
+                <a:latin typeface="Courier"/>
+              </a:rPr>
+              <a:t>    </a:t>
+            </a:r>
+            <a:r>
+              <a:rPr>
+                <a:solidFill>
+                  <a:srgbClr val="657422"/>
+                </a:solidFill>
+                <a:latin typeface="Courier"/>
+              </a:rPr>
+              <a:t>se_mm   =</a:t>
+            </a:r>
+            <a:r>
+              <a:rPr>
+                <a:solidFill>
+                  <a:srgbClr val="003B4F"/>
+                </a:solidFill>
+                <a:latin typeface="Courier"/>
+              </a:rPr>
+              <a:t> </a:t>
+            </a:r>
+            <a:r>
+              <a:rPr>
+                <a:solidFill>
+                  <a:srgbClr val="4758AB"/>
+                </a:solidFill>
+                <a:latin typeface="Courier"/>
+              </a:rPr>
+              <a:t>round</a:t>
+            </a:r>
+            <a:r>
+              <a:rPr>
+                <a:solidFill>
+                  <a:srgbClr val="003B4F"/>
+                </a:solidFill>
+                <a:latin typeface="Courier"/>
+              </a:rPr>
+              <a:t>(</a:t>
+            </a:r>
+            <a:r>
+              <a:rPr>
+                <a:solidFill>
+                  <a:srgbClr val="4758AB"/>
+                </a:solidFill>
+                <a:latin typeface="Courier"/>
+              </a:rPr>
+              <a:t>sd</a:t>
+            </a:r>
+            <a:r>
+              <a:rPr>
+                <a:solidFill>
+                  <a:srgbClr val="003B4F"/>
+                </a:solidFill>
+                <a:latin typeface="Courier"/>
+              </a:rPr>
+              <a:t>(length_mm, </a:t>
+            </a:r>
+            <a:r>
+              <a:rPr>
+                <a:solidFill>
+                  <a:srgbClr val="657422"/>
+                </a:solidFill>
+                <a:latin typeface="Courier"/>
+              </a:rPr>
+              <a:t>na.rm =</a:t>
+            </a:r>
+            <a:r>
+              <a:rPr>
+                <a:solidFill>
+                  <a:srgbClr val="003B4F"/>
+                </a:solidFill>
+                <a:latin typeface="Courier"/>
+              </a:rPr>
+              <a:t> </a:t>
+            </a:r>
+            <a:r>
+              <a:rPr>
+                <a:solidFill>
+                  <a:srgbClr val="8F5902"/>
+                </a:solidFill>
+                <a:latin typeface="Courier"/>
+              </a:rPr>
+              <a:t>TRUE</a:t>
+            </a:r>
+            <a:r>
+              <a:rPr>
+                <a:solidFill>
+                  <a:srgbClr val="003B4F"/>
+                </a:solidFill>
+                <a:latin typeface="Courier"/>
+              </a:rPr>
+              <a:t>) </a:t>
+            </a:r>
+            <a:r>
+              <a:rPr>
+                <a:solidFill>
+                  <a:srgbClr val="5E5E5E"/>
+                </a:solidFill>
+                <a:latin typeface="Courier"/>
+              </a:rPr>
+              <a:t>/</a:t>
+            </a:r>
+            <a:r>
+              <a:rPr>
+                <a:solidFill>
+                  <a:srgbClr val="003B4F"/>
+                </a:solidFill>
+                <a:latin typeface="Courier"/>
+              </a:rPr>
+              <a:t> </a:t>
+            </a:r>
+            <a:r>
+              <a:rPr>
+                <a:solidFill>
+                  <a:srgbClr val="4758AB"/>
+                </a:solidFill>
+                <a:latin typeface="Courier"/>
+              </a:rPr>
+              <a:t>sqrt</a:t>
+            </a:r>
+            <a:r>
+              <a:rPr>
+                <a:solidFill>
+                  <a:srgbClr val="003B4F"/>
+                </a:solidFill>
+                <a:latin typeface="Courier"/>
+              </a:rPr>
+              <a:t>(n), </a:t>
+            </a:r>
+            <a:r>
+              <a:rPr>
+                <a:solidFill>
+                  <a:srgbClr val="AD0000"/>
+                </a:solidFill>
+                <a:latin typeface="Courier"/>
+              </a:rPr>
+              <a:t>2</a:t>
+            </a:r>
+            <a:r>
+              <a:rPr>
+                <a:solidFill>
+                  <a:srgbClr val="003B4F"/>
+                </a:solidFill>
+                <a:latin typeface="Courier"/>
+              </a:rPr>
+              <a:t>)</a:t>
+            </a:r>
+            <a:br/>
+            <a:r>
+              <a:rPr>
+                <a:solidFill>
+                  <a:srgbClr val="003B4F"/>
+                </a:solidFill>
+                <a:latin typeface="Courier"/>
+              </a:rPr>
+              <a:t>  )</a:t>
+            </a:r>
+            <a:br/>
+            <a:br/>
+            <a:r>
+              <a:rPr>
+                <a:solidFill>
+                  <a:srgbClr val="003B4F"/>
+                </a:solidFill>
+                <a:latin typeface="Courier"/>
+              </a:rPr>
+              <a:t>size_class_stats_df</a:t>
+            </a:r>
+          </a:p>
+          <a:p>
+            <a:pPr lvl="0" indent="0" marL="0">
+              <a:buNone/>
+            </a:pPr>
+            <a:r>
+              <a:rPr/>
+              <a:t>✏️ </a:t>
+            </a:r>
+            <a:r>
+              <a:rPr b="1"/>
+              <a:t>Your turn:</a:t>
+            </a:r>
+            <a:r>
+              <a:rPr/>
+              <a:t> Which </a:t>
+            </a:r>
+            <a:r>
+              <a:rPr>
+                <a:latin typeface="Courier"/>
+              </a:rPr>
+              <a:t>size_class</a:t>
+            </a:r>
+            <a:r>
+              <a:rPr/>
+              <a:t> has the largest </a:t>
+            </a:r>
+            <a:r>
+              <a:rPr>
+                <a:latin typeface="Courier"/>
+              </a:rPr>
+              <a:t>n</a:t>
+            </a:r>
+            <a:r>
+              <a:rPr/>
+              <a:t>? Does that match what you’d expect from the cutoffs (16 and 20)? </a:t>
+            </a:r>
+            <a:r>
+              <a:rPr>
+                <a:latin typeface="Courier"/>
+              </a:rPr>
+              <a:t>________________________</a:t>
+            </a:r>
+          </a:p>
+        </p:txBody>
+      </p:sp>
+    </p:spTree>
+  </p:cSld>
+</p:sld>
+</file>
+
+<file path=ppt/slides/slide13.xml><?xml version="1.0" encoding="utf-8"?>
+<p:sld xmlns:a="http://schemas.openxmlformats.org/drawingml/2006/main" xmlns:r="http://schemas.openxmlformats.org/officeDocument/2006/relationships" xmlns:p="http://schemas.openxmlformats.org/presentationml/2006/main">
+  <p:cSld>
+    <p:spTree>
+      <p:nvGrpSpPr>
+        <p:cNvPr id="1" name=""/>
+        <p:cNvGrpSpPr/>
+        <p:nvPr/>
+      </p:nvGrpSpPr>
+      <p:grpSpPr>
+        <a:xfrm>
+          <a:off x="0" y="0"/>
+          <a:ext cx="0" cy="0"/>
+          <a:chOff x="0" y="0"/>
+          <a:chExt cx="0" cy="0"/>
+        </a:xfrm>
+      </p:grpSpPr>
+      <p:sp>
+        <p:nvSpPr>
+          <p:cNvPr id="2" name="Title 1"/>
+          <p:cNvSpPr>
+            <a:spLocks noGrp="1"/>
+          </p:cNvSpPr>
+          <p:nvPr>
+            <p:ph type="title"/>
+          </p:nvPr>
+        </p:nvSpPr>
+        <p:spPr>
+          <a:xfrm>
+            <a:off x="0" y="0"/>
+            <a:ext cx="9144000" cy="582780"/>
+          </a:xfrm>
+        </p:spPr>
+        <p:txBody>
+          <a:bodyPr/>
+          <a:lstStyle/>
+          <a:p>
+            <a:pPr lvl="0" indent="0" marL="0">
+              <a:buNone/>
+            </a:pPr>
+            <a:r>
+              <a:rPr/>
+              <a:t>Part 8 · Save your summary table</a:t>
+            </a:r>
+          </a:p>
+        </p:txBody>
+      </p:sp>
+      <p:sp>
+        <p:nvSpPr>
+          <p:cNvPr id="3" name="Content Placeholder 2"/>
+          <p:cNvSpPr>
+            <a:spLocks noGrp="1"/>
+          </p:cNvSpPr>
+          <p:nvPr>
+            <p:ph idx="1"/>
+          </p:nvPr>
+        </p:nvSpPr>
+        <p:spPr/>
+        <p:txBody>
+          <a:bodyPr/>
+          <a:lstStyle/>
+          <a:p>
+            <a:pPr lvl="0" indent="0" marL="0">
+              <a:buNone/>
+            </a:pPr>
+            <a:r>
+              <a:rPr b="1"/>
+              <a:t>▶ Run this:</a:t>
+            </a:r>
+          </a:p>
+          <a:p>
+            <a:pPr lvl="0" indent="0">
+              <a:buNone/>
+            </a:pPr>
+            <a:r>
+              <a:rPr>
+                <a:solidFill>
+                  <a:srgbClr val="4758AB"/>
+                </a:solidFill>
+                <a:latin typeface="Courier"/>
+              </a:rPr>
+              <a:t>write_csv</a:t>
+            </a:r>
+            <a:r>
+              <a:rPr>
+                <a:solidFill>
+                  <a:srgbClr val="003B4F"/>
+                </a:solidFill>
+                <a:latin typeface="Courier"/>
+              </a:rPr>
+              <a:t>(side_stats_df, </a:t>
+            </a:r>
+            <a:r>
+              <a:rPr>
+                <a:solidFill>
+                  <a:srgbClr val="20794D"/>
+                </a:solidFill>
+                <a:latin typeface="Courier"/>
+              </a:rPr>
+              <a:t>"data/pine_needles_side_stats.csv"</a:t>
+            </a:r>
+            <a:r>
+              <a:rPr>
+                <a:solidFill>
+                  <a:srgbClr val="003B4F"/>
+                </a:solidFill>
+                <a:latin typeface="Courier"/>
+              </a:rPr>
+              <a:t>)</a:t>
+            </a:r>
+          </a:p>
+          <a:p>
+            <a:pPr lvl="0" indent="0" marL="0">
+              <a:buNone/>
+            </a:pPr>
+            <a:r>
+              <a:rPr/>
+              <a:t>Check your </a:t>
+            </a:r>
+            <a:r>
+              <a:rPr>
+                <a:latin typeface="Courier"/>
+              </a:rPr>
+              <a:t>data/</a:t>
+            </a:r>
+            <a:r>
+              <a:rPr/>
+              <a:t> folder — the summary table should be there.</a:t>
+            </a:r>
+          </a:p>
+        </p:txBody>
+      </p:sp>
+    </p:spTree>
+  </p:cSld>
+</p:sld>
+</file>
+
+<file path=ppt/slides/slide14.xml><?xml version="1.0" encoding="utf-8"?>
+<p:sld xmlns:a="http://schemas.openxmlformats.org/drawingml/2006/main" xmlns:r="http://schemas.openxmlformats.org/officeDocument/2006/relationships" xmlns:p="http://schemas.openxmlformats.org/presentationml/2006/main">
+  <p:cSld>
+    <p:spTree>
+      <p:nvGrpSpPr>
+        <p:cNvPr id="1" name=""/>
+        <p:cNvGrpSpPr/>
+        <p:nvPr/>
+      </p:nvGrpSpPr>
+      <p:grpSpPr>
+        <a:xfrm>
+          <a:off x="0" y="0"/>
+          <a:ext cx="0" cy="0"/>
+          <a:chOff x="0" y="0"/>
+          <a:chExt cx="0" cy="0"/>
+        </a:xfrm>
+      </p:grpSpPr>
+      <p:sp>
+        <p:nvSpPr>
+          <p:cNvPr id="2" name="Title 1"/>
+          <p:cNvSpPr>
+            <a:spLocks noGrp="1"/>
+          </p:cNvSpPr>
+          <p:nvPr>
+            <p:ph type="title"/>
+          </p:nvPr>
+        </p:nvSpPr>
+        <p:spPr>
+          <a:xfrm>
+            <a:off x="0" y="0"/>
+            <a:ext cx="9144000" cy="582780"/>
+          </a:xfrm>
+        </p:spPr>
+        <p:txBody>
+          <a:bodyPr/>
+          <a:lstStyle/>
+          <a:p>
+            <a:pPr lvl="0" indent="0" marL="0">
+              <a:buNone/>
+            </a:pPr>
+            <a:r>
+              <a:rPr/>
+              <a:t>Part 9 · Review and checkpoint</a:t>
+            </a:r>
+          </a:p>
+        </p:txBody>
+      </p:sp>
+      <p:sp>
+        <p:nvSpPr>
+          <p:cNvPr id="3" name="Content Placeholder 2"/>
+          <p:cNvSpPr>
+            <a:spLocks noGrp="1"/>
+          </p:cNvSpPr>
+          <p:nvPr>
+            <p:ph idx="1"/>
+          </p:nvPr>
+        </p:nvSpPr>
+        <p:spPr/>
+        <p:txBody>
+          <a:bodyPr/>
+          <a:lstStyle/>
+          <a:p>
+            <a:pPr lvl="0" indent="0" marL="0">
+              <a:buNone/>
+            </a:pPr>
+            <a:r>
+              <a:rPr/>
+              <a:t>At this point you can:</a:t>
+            </a:r>
+          </a:p>
+          <a:p>
+            <a:pPr lvl="0"/>
+            <a:r>
+              <a:rPr/>
+              <a:t>☐ Compute mean and median, and explain when they disagree</a:t>
+            </a:r>
+          </a:p>
+          <a:p>
+            <a:pPr lvl="0"/>
+            <a:r>
+              <a:rPr/>
+              <a:t>☐ Compute variance and SD by hand from a vector</a:t>
+            </a:r>
+          </a:p>
+          <a:p>
+            <a:pPr lvl="0"/>
+            <a:r>
+              <a:rPr/>
+              <a:t>☐ Compute quantiles, range, and IQR, and explain how IQR relates to a boxplot</a:t>
+            </a:r>
+          </a:p>
+          <a:p>
+            <a:pPr lvl="0"/>
+            <a:r>
+              <a:rPr/>
+              <a:t>☐ Explain the </a:t>
+            </a:r>
+            <a:r>
+              <a:rPr>
+                <a:latin typeface="Courier"/>
+              </a:rPr>
+              <a:t>length()</a:t>
+            </a:r>
+            <a:r>
+              <a:rPr/>
+              <a:t> trap and fix it with </a:t>
+            </a:r>
+            <a:r>
+              <a:rPr>
+                <a:latin typeface="Courier"/>
+              </a:rPr>
+              <a:t>sum(!is.na())</a:t>
+            </a:r>
+          </a:p>
+          <a:p>
+            <a:pPr lvl="0"/>
+            <a:r>
+              <a:rPr/>
+              <a:t>☐ Compute SE and explain how it differs from SD</a:t>
+            </a:r>
+          </a:p>
+          <a:p>
+            <a:pPr lvl="0"/>
+            <a:r>
+              <a:rPr/>
+              <a:t>☐ Get a full-dataset overview with </a:t>
+            </a:r>
+            <a:r>
+              <a:rPr>
+                <a:latin typeface="Courier"/>
+              </a:rPr>
+              <a:t>skimr::skim()</a:t>
+            </a:r>
+          </a:p>
+          <a:p>
+            <a:pPr lvl="0"/>
+            <a:r>
+              <a:rPr/>
+              <a:t>☐ Use </a:t>
+            </a:r>
+            <a:r>
+              <a:rPr>
+                <a:latin typeface="Courier"/>
+              </a:rPr>
+              <a:t>group_by()</a:t>
+            </a:r>
+            <a:r>
+              <a:rPr/>
+              <a:t> + </a:t>
+            </a:r>
+            <a:r>
+              <a:rPr>
+                <a:latin typeface="Courier"/>
+              </a:rPr>
+              <a:t>summarize()</a:t>
+            </a:r>
+            <a:r>
+              <a:rPr/>
+              <a:t> to get n, mean, SD, and SE for every group at once — including </a:t>
+            </a:r>
+            <a:r>
+              <a:rPr>
+                <a:latin typeface="Courier"/>
+              </a:rPr>
+              <a:t>case_when()</a:t>
+            </a:r>
+            <a:r>
+              <a:rPr/>
+              <a:t> categories</a:t>
+            </a:r>
+          </a:p>
+          <a:p>
+            <a:pPr lvl="0"/>
+            <a:r>
+              <a:rPr/>
+              <a:t>☐ Save a summary table with </a:t>
+            </a:r>
+            <a:r>
+              <a:rPr>
+                <a:latin typeface="Courier"/>
+              </a:rPr>
+              <a:t>write_csv()</a:t>
+            </a:r>
+          </a:p>
+          <a:p>
+            <a:pPr lvl="0" indent="0" marL="0">
+              <a:buNone/>
+            </a:pPr>
+            <a:r>
+              <a:rPr/>
+              <a:t>✏️ </a:t>
+            </a:r>
+            <a:r>
+              <a:rPr b="1"/>
+              <a:t>Your turn — before you move on:</a:t>
+            </a:r>
+            <a:r>
+              <a:rPr/>
+              <a:t> Run your whole script top to bottom. Ran cleanly? </a:t>
+            </a:r>
+            <a:r>
+              <a:rPr>
+                <a:latin typeface="Courier"/>
+              </a:rPr>
+              <a:t>Y / N</a:t>
+            </a:r>
+            <a:r>
+              <a:rPr/>
+              <a:t> — if not, the error was: </a:t>
+            </a:r>
+            <a:r>
+              <a:rPr>
+                <a:latin typeface="Courier"/>
+              </a:rPr>
+              <a:t>________________________</a:t>
+            </a:r>
+          </a:p>
+          <a:p>
+            <a:pPr lvl="0" indent="0" marL="1270000">
+              <a:buNone/>
+            </a:pPr>
+            <a:r>
+              <a:rPr sz="2000" b="1"/>
+              <a:t>Note</a:t>
+            </a:r>
+          </a:p>
+          <a:p>
+            <a:pPr lvl="0" indent="0" marL="1270000">
+              <a:buNone/>
+            </a:pPr>
+            <a:r>
+              <a:rPr sz="2000" b="1"/>
+              <a:t>📤 What to turn in before next class</a:t>
+            </a:r>
+          </a:p>
+          <a:p>
+            <a:pPr lvl="0" indent="0" marL="1270000">
+              <a:buNone/>
+            </a:pPr>
+            <a:r>
+              <a:rPr sz="2000"/>
+              <a:t>Upload both of these to the course management system:</a:t>
+            </a:r>
+          </a:p>
+          <a:p>
+            <a:pPr lvl="0" indent="-342900" marL="342900">
+              <a:buAutoNum type="arabicPeriod"/>
+            </a:pPr>
+            <a:r>
+              <a:rPr sz="2000"/>
+              <a:t>Your code — the </a:t>
+            </a:r>
+            <a:r>
+              <a:rPr sz="2000">
+                <a:latin typeface="Courier"/>
+              </a:rPr>
+              <a:t>scripts/</a:t>
+            </a:r>
+            <a:r>
+              <a:rPr sz="2000"/>
+              <a:t> folder (or just </a:t>
+            </a:r>
+            <a:r>
+              <a:rPr sz="2000">
+                <a:latin typeface="Courier"/>
+              </a:rPr>
+              <a:t>03_descriptive_stats.R</a:t>
+            </a:r>
+            <a:r>
+              <a:rPr sz="2000"/>
+              <a:t>)</a:t>
+            </a:r>
+          </a:p>
+          <a:p>
+            <a:pPr lvl="0" indent="-342900" marL="342900">
+              <a:buAutoNum type="arabicPeriod"/>
+            </a:pPr>
+            <a:r>
+              <a:rPr sz="2000"/>
+              <a:t>This worksheet, with your written answers</a:t>
+            </a:r>
+          </a:p>
+        </p:txBody>
+      </p:sp>
+    </p:spTree>
+  </p:cSld>
+</p:sld>
+</file>
+
+<file path=ppt/slides/slide15.xml><?xml version="1.0" encoding="utf-8"?>
+<p:sld xmlns:a="http://schemas.openxmlformats.org/drawingml/2006/main" xmlns:r="http://schemas.openxmlformats.org/officeDocument/2006/relationships" xmlns:p="http://schemas.openxmlformats.org/presentationml/2006/main">
+  <p:cSld>
+    <p:spTree>
+      <p:nvGrpSpPr>
+        <p:cNvPr id="1" name=""/>
+        <p:cNvGrpSpPr/>
+        <p:nvPr/>
+      </p:nvGrpSpPr>
+      <p:grpSpPr>
+        <a:xfrm>
+          <a:off x="0" y="0"/>
+          <a:ext cx="0" cy="0"/>
+          <a:chOff x="0" y="0"/>
+          <a:chExt cx="0" cy="0"/>
+        </a:xfrm>
+      </p:grpSpPr>
+      <p:sp>
+        <p:nvSpPr>
+          <p:cNvPr id="2" name="Title 1"/>
+          <p:cNvSpPr>
+            <a:spLocks noGrp="1"/>
+          </p:cNvSpPr>
+          <p:nvPr>
+            <p:ph type="title"/>
+          </p:nvPr>
+        </p:nvSpPr>
+        <p:spPr>
+          <a:xfrm>
+            <a:off x="0" y="0"/>
+            <a:ext cx="9144000" cy="582780"/>
+          </a:xfrm>
+        </p:spPr>
+        <p:txBody>
+          <a:bodyPr/>
+          <a:lstStyle/>
+          <a:p>
+            <a:pPr lvl="0" indent="0" marL="0">
+              <a:buNone/>
+            </a:pPr>
+            <a:r>
+              <a:rPr/>
               <a:t>Getting unstuck</a:t>
             </a:r>
           </a:p>
@@ -4872,17 +6934,7 @@
             </a:pPr>
             <a:r>
               <a:rPr/>
-              <a:t>Part 4 · The </a:t>
-            </a:r>
-            <a:r>
-              <a:rPr>
-                <a:latin typeface="Courier"/>
-              </a:rPr>
-              <a:t>length()</a:t>
-            </a:r>
-            <a:r>
-              <a:rPr/>
-              <a:t> trap</a:t>
+              <a:t>Part 3b · Quantiles, range, and IQR</a:t>
             </a:r>
           </a:p>
         </p:txBody>
@@ -4917,119 +6969,75 @@
             <a:r>
               <a:rPr>
                 <a:solidFill>
-                  <a:srgbClr val="003B4F"/>
-                </a:solidFill>
-                <a:latin typeface="Courier"/>
-              </a:rPr>
-              <a:t>x &lt;- </a:t>
-            </a:r>
-            <a:r>
-              <a:rPr>
-                <a:solidFill>
                   <a:srgbClr val="4758AB"/>
                 </a:solidFill>
                 <a:latin typeface="Courier"/>
               </a:rPr>
-              <a:t>c</a:t>
-            </a:r>
-            <a:r>
-              <a:rPr>
-                <a:solidFill>
-                  <a:srgbClr val="003B4F"/>
-                </a:solidFill>
-                <a:latin typeface="Courier"/>
-              </a:rPr>
-              <a:t>(</a:t>
-            </a:r>
-            <a:r>
-              <a:rPr>
-                <a:solidFill>
-                  <a:srgbClr val="AD0000"/>
-                </a:solidFill>
-                <a:latin typeface="Courier"/>
-              </a:rPr>
-              <a:t>4</a:t>
-            </a:r>
-            <a:r>
-              <a:rPr>
-                <a:solidFill>
-                  <a:srgbClr val="003B4F"/>
-                </a:solidFill>
-                <a:latin typeface="Courier"/>
-              </a:rPr>
-              <a:t>, </a:t>
-            </a:r>
-            <a:r>
-              <a:rPr>
-                <a:solidFill>
-                  <a:srgbClr val="AD0000"/>
-                </a:solidFill>
-                <a:latin typeface="Courier"/>
-              </a:rPr>
-              <a:t>3</a:t>
-            </a:r>
-            <a:r>
-              <a:rPr>
-                <a:solidFill>
-                  <a:srgbClr val="003B4F"/>
-                </a:solidFill>
-                <a:latin typeface="Courier"/>
-              </a:rPr>
-              <a:t>, </a:t>
-            </a:r>
-            <a:r>
-              <a:rPr>
-                <a:solidFill>
-                  <a:srgbClr val="8F5902"/>
-                </a:solidFill>
-                <a:latin typeface="Courier"/>
-              </a:rPr>
-              <a:t>NA</a:t>
-            </a:r>
-            <a:r>
-              <a:rPr>
-                <a:solidFill>
-                  <a:srgbClr val="003B4F"/>
-                </a:solidFill>
-                <a:latin typeface="Courier"/>
-              </a:rPr>
-              <a:t>, </a:t>
-            </a:r>
-            <a:r>
-              <a:rPr>
-                <a:solidFill>
-                  <a:srgbClr val="AD0000"/>
-                </a:solidFill>
-                <a:latin typeface="Courier"/>
-              </a:rPr>
-              <a:t>7</a:t>
-            </a:r>
-            <a:r>
-              <a:rPr>
-                <a:solidFill>
-                  <a:srgbClr val="003B4F"/>
-                </a:solidFill>
-                <a:latin typeface="Courier"/>
-              </a:rPr>
-              <a:t>, </a:t>
-            </a:r>
-            <a:r>
-              <a:rPr>
-                <a:solidFill>
-                  <a:srgbClr val="8F5902"/>
-                </a:solidFill>
-                <a:latin typeface="Courier"/>
-              </a:rPr>
-              <a:t>NA</a:t>
-            </a:r>
-            <a:r>
-              <a:rPr>
-                <a:solidFill>
-                  <a:srgbClr val="003B4F"/>
-                </a:solidFill>
-                <a:latin typeface="Courier"/>
-              </a:rPr>
-              <a:t>)</a:t>
+              <a:t>range</a:t>
+            </a:r>
+            <a:r>
+              <a:rPr>
+                <a:solidFill>
+                  <a:srgbClr val="003B4F"/>
+                </a:solidFill>
+                <a:latin typeface="Courier"/>
+              </a:rPr>
+              <a:t>(lee_lengths)</a:t>
+            </a:r>
+            <a:br/>
+            <a:r>
+              <a:rPr>
+                <a:solidFill>
+                  <a:srgbClr val="4758AB"/>
+                </a:solidFill>
+                <a:latin typeface="Courier"/>
+              </a:rPr>
+              <a:t>max</a:t>
+            </a:r>
+            <a:r>
+              <a:rPr>
+                <a:solidFill>
+                  <a:srgbClr val="003B4F"/>
+                </a:solidFill>
+                <a:latin typeface="Courier"/>
+              </a:rPr>
+              <a:t>(lee_lengths) </a:t>
+            </a:r>
+            <a:r>
+              <a:rPr>
+                <a:solidFill>
+                  <a:srgbClr val="5E5E5E"/>
+                </a:solidFill>
+                <a:latin typeface="Courier"/>
+              </a:rPr>
+              <a:t>-</a:t>
+            </a:r>
+            <a:r>
+              <a:rPr>
+                <a:solidFill>
+                  <a:srgbClr val="003B4F"/>
+                </a:solidFill>
+                <a:latin typeface="Courier"/>
+              </a:rPr>
+              <a:t> </a:t>
+            </a:r>
+            <a:r>
+              <a:rPr>
+                <a:solidFill>
+                  <a:srgbClr val="4758AB"/>
+                </a:solidFill>
+                <a:latin typeface="Courier"/>
+              </a:rPr>
+              <a:t>min</a:t>
+            </a:r>
+            <a:r>
+              <a:rPr>
+                <a:solidFill>
+                  <a:srgbClr val="003B4F"/>
+                </a:solidFill>
+                <a:latin typeface="Courier"/>
+              </a:rPr>
+              <a:t>(lee_lengths)</a:t>
             </a:r>
             <a:br/>
             <a:br/>
@@ -5040,16 +7048,16 @@
                 </a:solidFill>
                 <a:latin typeface="Courier"/>
               </a:rPr>
-              <a:t>length</a:t>
-            </a:r>
-            <a:r>
-              <a:rPr>
-                <a:solidFill>
-                  <a:srgbClr val="003B4F"/>
-                </a:solidFill>
-                <a:latin typeface="Courier"/>
-              </a:rPr>
-              <a:t>(x)</a:t>
+              <a:t>quantile</a:t>
+            </a:r>
+            <a:r>
+              <a:rPr>
+                <a:solidFill>
+                  <a:srgbClr val="003B4F"/>
+                </a:solidFill>
+                <a:latin typeface="Courier"/>
+              </a:rPr>
+              <a:t>(lee_lengths)</a:t>
             </a:r>
             <a:br/>
             <a:r>
@@ -5059,80 +7067,16 @@
                 </a:solidFill>
                 <a:latin typeface="Courier"/>
               </a:rPr>
-              <a:t>sum</a:t>
-            </a:r>
-            <a:r>
-              <a:rPr>
-                <a:solidFill>
-                  <a:srgbClr val="003B4F"/>
-                </a:solidFill>
-                <a:latin typeface="Courier"/>
-              </a:rPr>
-              <a:t>(</a:t>
-            </a:r>
-            <a:r>
-              <a:rPr>
-                <a:solidFill>
-                  <a:srgbClr val="4758AB"/>
-                </a:solidFill>
-                <a:latin typeface="Courier"/>
-              </a:rPr>
-              <a:t>is.na</a:t>
-            </a:r>
-            <a:r>
-              <a:rPr>
-                <a:solidFill>
-                  <a:srgbClr val="003B4F"/>
-                </a:solidFill>
-                <a:latin typeface="Courier"/>
-              </a:rPr>
-              <a:t>(x))</a:t>
-            </a:r>
-            <a:br/>
-            <a:r>
-              <a:rPr>
-                <a:solidFill>
-                  <a:srgbClr val="4758AB"/>
-                </a:solidFill>
-                <a:latin typeface="Courier"/>
-              </a:rPr>
-              <a:t>sum</a:t>
-            </a:r>
-            <a:r>
-              <a:rPr>
-                <a:solidFill>
-                  <a:srgbClr val="003B4F"/>
-                </a:solidFill>
-                <a:latin typeface="Courier"/>
-              </a:rPr>
-              <a:t>(</a:t>
-            </a:r>
-            <a:r>
-              <a:rPr>
-                <a:solidFill>
-                  <a:srgbClr val="5E5E5E"/>
-                </a:solidFill>
-                <a:latin typeface="Courier"/>
-              </a:rPr>
-              <a:t>!</a:t>
-            </a:r>
-            <a:r>
-              <a:rPr>
-                <a:solidFill>
-                  <a:srgbClr val="4758AB"/>
-                </a:solidFill>
-                <a:latin typeface="Courier"/>
-              </a:rPr>
-              <a:t>is.na</a:t>
-            </a:r>
-            <a:r>
-              <a:rPr>
-                <a:solidFill>
-                  <a:srgbClr val="003B4F"/>
-                </a:solidFill>
-                <a:latin typeface="Courier"/>
-              </a:rPr>
-              <a:t>(x))</a:t>
+              <a:t>IQR</a:t>
+            </a:r>
+            <a:r>
+              <a:rPr>
+                <a:solidFill>
+                  <a:srgbClr val="003B4F"/>
+                </a:solidFill>
+                <a:latin typeface="Courier"/>
+              </a:rPr>
+              <a:t>(lee_lengths)</a:t>
             </a:r>
           </a:p>
           <a:p>
@@ -5149,17 +7093,17 @@
             </a:r>
             <a:r>
               <a:rPr/>
-              <a:t> Explain in your own words why </a:t>
-            </a:r>
-            <a:r>
-              <a:rPr>
-                <a:latin typeface="Courier"/>
-              </a:rPr>
-              <a:t>length(x)</a:t>
+              <a:t> Compute the same four things for </a:t>
+            </a:r>
+            <a:r>
+              <a:rPr>
+                <a:latin typeface="Courier"/>
+              </a:rPr>
+              <a:t>wind_lengths</a:t>
             </a:r>
             <a:r>
               <a:rPr/>
-              <a:t> gives the wrong answer for a sample size when there are missing values.</a:t>
+              <a:t>. Which side has the wider IQR?</a:t>
             </a:r>
           </a:p>
           <a:p>
@@ -5168,370 +7112,23 @@
             </a:pPr>
             <a:r>
               <a:rPr>
-                <a:latin typeface="Courier"/>
-              </a:rPr>
-              <a:t>________________________________________________________</a:t>
-            </a:r>
-          </a:p>
-          <a:p>
-            <a:pPr lvl="0" indent="0" marL="0">
+                <a:solidFill>
+                  <a:srgbClr val="5E5E5E"/>
+                </a:solidFill>
+                <a:latin typeface="Courier"/>
+              </a:rPr>
+              <a:t># Write your code here:</a:t>
+            </a:r>
+          </a:p>
+          <a:p>
+            <a:pPr lvl="0" indent="0">
               <a:buNone/>
             </a:pPr>
             <a:r>
-              <a:rPr b="1"/>
-              <a:t>▶ Run this:</a:t>
-            </a:r>
-          </a:p>
-          <a:p>
-            <a:pPr lvl="0" indent="0">
-              <a:buNone/>
-            </a:pPr>
-            <a:r>
-              <a:rPr>
-                <a:solidFill>
-                  <a:srgbClr val="003B4F"/>
-                </a:solidFill>
-                <a:latin typeface="Courier"/>
-              </a:rPr>
-              <a:t>wrong_n  &lt;- </a:t>
-            </a:r>
-            <a:r>
-              <a:rPr>
-                <a:solidFill>
-                  <a:srgbClr val="4758AB"/>
-                </a:solidFill>
-                <a:latin typeface="Courier"/>
-              </a:rPr>
-              <a:t>length</a:t>
-            </a:r>
-            <a:r>
-              <a:rPr>
-                <a:solidFill>
-                  <a:srgbClr val="003B4F"/>
-                </a:solidFill>
-                <a:latin typeface="Courier"/>
-              </a:rPr>
-              <a:t>(x)</a:t>
-            </a:r>
-            <a:br/>
-            <a:r>
-              <a:rPr>
-                <a:solidFill>
-                  <a:srgbClr val="003B4F"/>
-                </a:solidFill>
-                <a:latin typeface="Courier"/>
-              </a:rPr>
-              <a:t>wrong_se &lt;- </a:t>
-            </a:r>
-            <a:r>
-              <a:rPr>
-                <a:solidFill>
-                  <a:srgbClr val="4758AB"/>
-                </a:solidFill>
-                <a:latin typeface="Courier"/>
-              </a:rPr>
-              <a:t>sd</a:t>
-            </a:r>
-            <a:r>
-              <a:rPr>
-                <a:solidFill>
-                  <a:srgbClr val="003B4F"/>
-                </a:solidFill>
-                <a:latin typeface="Courier"/>
-              </a:rPr>
-              <a:t>(x, </a:t>
-            </a:r>
-            <a:r>
-              <a:rPr>
-                <a:solidFill>
-                  <a:srgbClr val="657422"/>
-                </a:solidFill>
-                <a:latin typeface="Courier"/>
-              </a:rPr>
-              <a:t>na.rm =</a:t>
-            </a:r>
-            <a:r>
-              <a:rPr>
-                <a:solidFill>
-                  <a:srgbClr val="003B4F"/>
-                </a:solidFill>
-                <a:latin typeface="Courier"/>
-              </a:rPr>
-              <a:t> </a:t>
-            </a:r>
-            <a:r>
-              <a:rPr>
-                <a:solidFill>
-                  <a:srgbClr val="8F5902"/>
-                </a:solidFill>
-                <a:latin typeface="Courier"/>
-              </a:rPr>
-              <a:t>TRUE</a:t>
-            </a:r>
-            <a:r>
-              <a:rPr>
-                <a:solidFill>
-                  <a:srgbClr val="003B4F"/>
-                </a:solidFill>
-                <a:latin typeface="Courier"/>
-              </a:rPr>
-              <a:t>) </a:t>
-            </a:r>
-            <a:r>
-              <a:rPr>
-                <a:solidFill>
-                  <a:srgbClr val="5E5E5E"/>
-                </a:solidFill>
-                <a:latin typeface="Courier"/>
-              </a:rPr>
-              <a:t>/</a:t>
-            </a:r>
-            <a:r>
-              <a:rPr>
-                <a:solidFill>
-                  <a:srgbClr val="003B4F"/>
-                </a:solidFill>
-                <a:latin typeface="Courier"/>
-              </a:rPr>
-              <a:t> </a:t>
-            </a:r>
-            <a:r>
-              <a:rPr>
-                <a:solidFill>
-                  <a:srgbClr val="4758AB"/>
-                </a:solidFill>
-                <a:latin typeface="Courier"/>
-              </a:rPr>
-              <a:t>sqrt</a:t>
-            </a:r>
-            <a:r>
-              <a:rPr>
-                <a:solidFill>
-                  <a:srgbClr val="003B4F"/>
-                </a:solidFill>
-                <a:latin typeface="Courier"/>
-              </a:rPr>
-              <a:t>(wrong_n)</a:t>
-            </a:r>
-            <a:br/>
-            <a:br/>
-            <a:r>
-              <a:rPr>
-                <a:solidFill>
-                  <a:srgbClr val="003B4F"/>
-                </a:solidFill>
-                <a:latin typeface="Courier"/>
-              </a:rPr>
-              <a:t>right_n  &lt;- </a:t>
-            </a:r>
-            <a:r>
-              <a:rPr>
-                <a:solidFill>
-                  <a:srgbClr val="4758AB"/>
-                </a:solidFill>
-                <a:latin typeface="Courier"/>
-              </a:rPr>
-              <a:t>sum</a:t>
-            </a:r>
-            <a:r>
-              <a:rPr>
-                <a:solidFill>
-                  <a:srgbClr val="003B4F"/>
-                </a:solidFill>
-                <a:latin typeface="Courier"/>
-              </a:rPr>
-              <a:t>(</a:t>
-            </a:r>
-            <a:r>
-              <a:rPr>
-                <a:solidFill>
-                  <a:srgbClr val="5E5E5E"/>
-                </a:solidFill>
-                <a:latin typeface="Courier"/>
-              </a:rPr>
-              <a:t>!</a:t>
-            </a:r>
-            <a:r>
-              <a:rPr>
-                <a:solidFill>
-                  <a:srgbClr val="4758AB"/>
-                </a:solidFill>
-                <a:latin typeface="Courier"/>
-              </a:rPr>
-              <a:t>is.na</a:t>
-            </a:r>
-            <a:r>
-              <a:rPr>
-                <a:solidFill>
-                  <a:srgbClr val="003B4F"/>
-                </a:solidFill>
-                <a:latin typeface="Courier"/>
-              </a:rPr>
-              <a:t>(x))</a:t>
-            </a:r>
-            <a:br/>
-            <a:r>
-              <a:rPr>
-                <a:solidFill>
-                  <a:srgbClr val="003B4F"/>
-                </a:solidFill>
-                <a:latin typeface="Courier"/>
-              </a:rPr>
-              <a:t>right_se &lt;- </a:t>
-            </a:r>
-            <a:r>
-              <a:rPr>
-                <a:solidFill>
-                  <a:srgbClr val="4758AB"/>
-                </a:solidFill>
-                <a:latin typeface="Courier"/>
-              </a:rPr>
-              <a:t>sd</a:t>
-            </a:r>
-            <a:r>
-              <a:rPr>
-                <a:solidFill>
-                  <a:srgbClr val="003B4F"/>
-                </a:solidFill>
-                <a:latin typeface="Courier"/>
-              </a:rPr>
-              <a:t>(x, </a:t>
-            </a:r>
-            <a:r>
-              <a:rPr>
-                <a:solidFill>
-                  <a:srgbClr val="657422"/>
-                </a:solidFill>
-                <a:latin typeface="Courier"/>
-              </a:rPr>
-              <a:t>na.rm =</a:t>
-            </a:r>
-            <a:r>
-              <a:rPr>
-                <a:solidFill>
-                  <a:srgbClr val="003B4F"/>
-                </a:solidFill>
-                <a:latin typeface="Courier"/>
-              </a:rPr>
-              <a:t> </a:t>
-            </a:r>
-            <a:r>
-              <a:rPr>
-                <a:solidFill>
-                  <a:srgbClr val="8F5902"/>
-                </a:solidFill>
-                <a:latin typeface="Courier"/>
-              </a:rPr>
-              <a:t>TRUE</a:t>
-            </a:r>
-            <a:r>
-              <a:rPr>
-                <a:solidFill>
-                  <a:srgbClr val="003B4F"/>
-                </a:solidFill>
-                <a:latin typeface="Courier"/>
-              </a:rPr>
-              <a:t>) </a:t>
-            </a:r>
-            <a:r>
-              <a:rPr>
-                <a:solidFill>
-                  <a:srgbClr val="5E5E5E"/>
-                </a:solidFill>
-                <a:latin typeface="Courier"/>
-              </a:rPr>
-              <a:t>/</a:t>
-            </a:r>
-            <a:r>
-              <a:rPr>
-                <a:solidFill>
-                  <a:srgbClr val="003B4F"/>
-                </a:solidFill>
-                <a:latin typeface="Courier"/>
-              </a:rPr>
-              <a:t> </a:t>
-            </a:r>
-            <a:r>
-              <a:rPr>
-                <a:solidFill>
-                  <a:srgbClr val="4758AB"/>
-                </a:solidFill>
-                <a:latin typeface="Courier"/>
-              </a:rPr>
-              <a:t>sqrt</a:t>
-            </a:r>
-            <a:r>
-              <a:rPr>
-                <a:solidFill>
-                  <a:srgbClr val="003B4F"/>
-                </a:solidFill>
-                <a:latin typeface="Courier"/>
-              </a:rPr>
-              <a:t>(right_n)</a:t>
-            </a:r>
-            <a:br/>
-            <a:br/>
-            <a:r>
-              <a:rPr>
-                <a:solidFill>
-                  <a:srgbClr val="003B4F"/>
-                </a:solidFill>
-                <a:latin typeface="Courier"/>
-              </a:rPr>
-              <a:t>wrong_se</a:t>
-            </a:r>
-            <a:br/>
-            <a:r>
-              <a:rPr>
-                <a:solidFill>
-                  <a:srgbClr val="003B4F"/>
-                </a:solidFill>
-                <a:latin typeface="Courier"/>
-              </a:rPr>
-              <a:t>right_se</a:t>
-            </a:r>
-          </a:p>
-          <a:p>
-            <a:pPr lvl="0" indent="0" marL="0">
-              <a:buNone/>
-            </a:pPr>
-            <a:r>
-              <a:rPr/>
-              <a:t>✏️ </a:t>
-            </a:r>
-            <a:r>
-              <a:rPr b="1"/>
-              <a:t>Your turn:</a:t>
-            </a:r>
-            <a:r>
-              <a:rPr/>
-              <a:t> Are </a:t>
-            </a:r>
-            <a:r>
-              <a:rPr>
-                <a:latin typeface="Courier"/>
-              </a:rPr>
-              <a:t>wrong_se</a:t>
-            </a:r>
-            <a:r>
-              <a:rPr/>
-              <a:t> and </a:t>
-            </a:r>
-            <a:r>
-              <a:rPr>
-                <a:latin typeface="Courier"/>
-              </a:rPr>
-              <a:t>right_se</a:t>
-            </a:r>
-            <a:r>
-              <a:rPr/>
-              <a:t> the same number? Why or why not? </a:t>
-            </a:r>
-            <a:r>
-              <a:rPr>
-                <a:latin typeface="Courier"/>
-              </a:rPr>
-              <a:t>________________________</a:t>
+              <a:rPr>
+                <a:latin typeface="Courier"/>
+              </a:rPr>
+              <a:t>Wider IQR: ________________________</a:t>
             </a:r>
           </a:p>
           <a:p>
@@ -5553,47 +7150,27 @@
             </a:r>
             <a:r>
               <a:rPr sz="2000"/>
-              <a:t> Add a third </a:t>
+              <a:t> Confirm that </a:t>
             </a:r>
             <a:r>
               <a:rPr sz="2000">
                 <a:latin typeface="Courier"/>
               </a:rPr>
-              <a:t>NA</a:t>
+              <a:t>IQR(lee_lengths)</a:t>
             </a:r>
             <a:r>
               <a:rPr sz="2000"/>
-              <a:t> to </a:t>
+              <a:t> equals </a:t>
             </a:r>
             <a:r>
               <a:rPr sz="2000">
                 <a:latin typeface="Courier"/>
               </a:rPr>
-              <a:t>x</a:t>
+              <a:t>quantile(lee_lengths, 0.75) - quantile(lee_lengths, 0.25)</a:t>
             </a:r>
             <a:r>
               <a:rPr sz="2000"/>
-              <a:t> and rerun both calculations. What happens to </a:t>
-            </a:r>
-            <a:r>
-              <a:rPr sz="2000">
-                <a:latin typeface="Courier"/>
-              </a:rPr>
-              <a:t>wrong_se</a:t>
-            </a:r>
-            <a:r>
-              <a:rPr sz="2000"/>
-              <a:t> and </a:t>
-            </a:r>
-            <a:r>
-              <a:rPr sz="2000">
-                <a:latin typeface="Courier"/>
-              </a:rPr>
-              <a:t>right_se</a:t>
-            </a:r>
-            <a:r>
-              <a:rPr sz="2000"/>
-              <a:t> this time?</a:t>
+              <a:t> by computing both and comparing.</a:t>
             </a:r>
           </a:p>
         </p:txBody>
@@ -5645,7 +7222,17 @@
             </a:pPr>
             <a:r>
               <a:rPr/>
-              <a:t>Part 5 · Standard error, on real data</a:t>
+              <a:t>Part 4 · The </a:t>
+            </a:r>
+            <a:r>
+              <a:rPr>
+                <a:latin typeface="Courier"/>
+              </a:rPr>
+              <a:t>length()</a:t>
+            </a:r>
+            <a:r>
+              <a:rPr/>
+              <a:t> trap</a:t>
             </a:r>
           </a:p>
         </p:txBody>
@@ -5684,7 +7271,7 @@
                 </a:solidFill>
                 <a:latin typeface="Courier"/>
               </a:rPr>
-              <a:t>n_lee  &lt;- </a:t>
+              <a:t>x &lt;- </a:t>
             </a:r>
             <a:r>
               <a:rPr>
@@ -5693,7 +7280,7 @@
                 </a:solidFill>
                 <a:latin typeface="Courier"/>
               </a:rPr>
-              <a:t>sum</a:t>
+              <a:t>c</a:t>
             </a:r>
             <a:r>
               <a:rPr>
@@ -5707,103 +7294,292 @@
             <a:r>
               <a:rPr>
                 <a:solidFill>
-                  <a:srgbClr val="5E5E5E"/>
-                </a:solidFill>
-                <a:latin typeface="Courier"/>
-              </a:rPr>
-              <a:t>!</a:t>
-            </a:r>
-            <a:r>
-              <a:rPr>
-                <a:solidFill>
-                  <a:srgbClr val="4758AB"/>
-                </a:solidFill>
-                <a:latin typeface="Courier"/>
-              </a:rPr>
-              <a:t>is.na</a:t>
-            </a:r>
-            <a:r>
-              <a:rPr>
-                <a:solidFill>
-                  <a:srgbClr val="003B4F"/>
-                </a:solidFill>
-                <a:latin typeface="Courier"/>
-              </a:rPr>
-              <a:t>(lee_lengths))</a:t>
-            </a:r>
-            <a:br/>
-            <a:r>
-              <a:rPr>
-                <a:solidFill>
-                  <a:srgbClr val="003B4F"/>
-                </a:solidFill>
-                <a:latin typeface="Courier"/>
-              </a:rPr>
-              <a:t>n_wind &lt;- </a:t>
-            </a:r>
-            <a:r>
-              <a:rPr>
-                <a:solidFill>
-                  <a:srgbClr val="4758AB"/>
-                </a:solidFill>
-                <a:latin typeface="Courier"/>
-              </a:rPr>
-              <a:t>sum</a:t>
-            </a:r>
-            <a:r>
-              <a:rPr>
-                <a:solidFill>
-                  <a:srgbClr val="003B4F"/>
-                </a:solidFill>
-                <a:latin typeface="Courier"/>
-              </a:rPr>
-              <a:t>(</a:t>
-            </a:r>
-            <a:r>
-              <a:rPr>
-                <a:solidFill>
-                  <a:srgbClr val="5E5E5E"/>
-                </a:solidFill>
-                <a:latin typeface="Courier"/>
-              </a:rPr>
-              <a:t>!</a:t>
-            </a:r>
-            <a:r>
-              <a:rPr>
-                <a:solidFill>
-                  <a:srgbClr val="4758AB"/>
-                </a:solidFill>
-                <a:latin typeface="Courier"/>
-              </a:rPr>
-              <a:t>is.na</a:t>
-            </a:r>
-            <a:r>
-              <a:rPr>
-                <a:solidFill>
-                  <a:srgbClr val="003B4F"/>
-                </a:solidFill>
-                <a:latin typeface="Courier"/>
-              </a:rPr>
-              <a:t>(wind_lengths))</a:t>
+                  <a:srgbClr val="AD0000"/>
+                </a:solidFill>
+                <a:latin typeface="Courier"/>
+              </a:rPr>
+              <a:t>4</a:t>
+            </a:r>
+            <a:r>
+              <a:rPr>
+                <a:solidFill>
+                  <a:srgbClr val="003B4F"/>
+                </a:solidFill>
+                <a:latin typeface="Courier"/>
+              </a:rPr>
+              <a:t>, </a:t>
+            </a:r>
+            <a:r>
+              <a:rPr>
+                <a:solidFill>
+                  <a:srgbClr val="AD0000"/>
+                </a:solidFill>
+                <a:latin typeface="Courier"/>
+              </a:rPr>
+              <a:t>3</a:t>
+            </a:r>
+            <a:r>
+              <a:rPr>
+                <a:solidFill>
+                  <a:srgbClr val="003B4F"/>
+                </a:solidFill>
+                <a:latin typeface="Courier"/>
+              </a:rPr>
+              <a:t>, </a:t>
+            </a:r>
+            <a:r>
+              <a:rPr>
+                <a:solidFill>
+                  <a:srgbClr val="8F5902"/>
+                </a:solidFill>
+                <a:latin typeface="Courier"/>
+              </a:rPr>
+              <a:t>NA</a:t>
+            </a:r>
+            <a:r>
+              <a:rPr>
+                <a:solidFill>
+                  <a:srgbClr val="003B4F"/>
+                </a:solidFill>
+                <a:latin typeface="Courier"/>
+              </a:rPr>
+              <a:t>, </a:t>
+            </a:r>
+            <a:r>
+              <a:rPr>
+                <a:solidFill>
+                  <a:srgbClr val="AD0000"/>
+                </a:solidFill>
+                <a:latin typeface="Courier"/>
+              </a:rPr>
+              <a:t>7</a:t>
+            </a:r>
+            <a:r>
+              <a:rPr>
+                <a:solidFill>
+                  <a:srgbClr val="003B4F"/>
+                </a:solidFill>
+                <a:latin typeface="Courier"/>
+              </a:rPr>
+              <a:t>, </a:t>
+            </a:r>
+            <a:r>
+              <a:rPr>
+                <a:solidFill>
+                  <a:srgbClr val="8F5902"/>
+                </a:solidFill>
+                <a:latin typeface="Courier"/>
+              </a:rPr>
+              <a:t>NA</a:t>
+            </a:r>
+            <a:r>
+              <a:rPr>
+                <a:solidFill>
+                  <a:srgbClr val="003B4F"/>
+                </a:solidFill>
+                <a:latin typeface="Courier"/>
+              </a:rPr>
+              <a:t>)</a:t>
             </a:r>
             <a:br/>
             <a:br/>
             <a:r>
               <a:rPr>
                 <a:solidFill>
-                  <a:srgbClr val="003B4F"/>
-                </a:solidFill>
-                <a:latin typeface="Courier"/>
-              </a:rPr>
-              <a:t>se_lee  &lt;- </a:t>
-            </a:r>
-            <a:r>
-              <a:rPr>
-                <a:solidFill>
                   <a:srgbClr val="4758AB"/>
                 </a:solidFill>
                 <a:latin typeface="Courier"/>
               </a:rPr>
+              <a:t>length</a:t>
+            </a:r>
+            <a:r>
+              <a:rPr>
+                <a:solidFill>
+                  <a:srgbClr val="003B4F"/>
+                </a:solidFill>
+                <a:latin typeface="Courier"/>
+              </a:rPr>
+              <a:t>(x)</a:t>
+            </a:r>
+            <a:br/>
+            <a:r>
+              <a:rPr>
+                <a:solidFill>
+                  <a:srgbClr val="4758AB"/>
+                </a:solidFill>
+                <a:latin typeface="Courier"/>
+              </a:rPr>
+              <a:t>sum</a:t>
+            </a:r>
+            <a:r>
+              <a:rPr>
+                <a:solidFill>
+                  <a:srgbClr val="003B4F"/>
+                </a:solidFill>
+                <a:latin typeface="Courier"/>
+              </a:rPr>
+              <a:t>(</a:t>
+            </a:r>
+            <a:r>
+              <a:rPr>
+                <a:solidFill>
+                  <a:srgbClr val="4758AB"/>
+                </a:solidFill>
+                <a:latin typeface="Courier"/>
+              </a:rPr>
+              <a:t>is.na</a:t>
+            </a:r>
+            <a:r>
+              <a:rPr>
+                <a:solidFill>
+                  <a:srgbClr val="003B4F"/>
+                </a:solidFill>
+                <a:latin typeface="Courier"/>
+              </a:rPr>
+              <a:t>(x))</a:t>
+            </a:r>
+            <a:br/>
+            <a:r>
+              <a:rPr>
+                <a:solidFill>
+                  <a:srgbClr val="4758AB"/>
+                </a:solidFill>
+                <a:latin typeface="Courier"/>
+              </a:rPr>
+              <a:t>sum</a:t>
+            </a:r>
+            <a:r>
+              <a:rPr>
+                <a:solidFill>
+                  <a:srgbClr val="003B4F"/>
+                </a:solidFill>
+                <a:latin typeface="Courier"/>
+              </a:rPr>
+              <a:t>(</a:t>
+            </a:r>
+            <a:r>
+              <a:rPr>
+                <a:solidFill>
+                  <a:srgbClr val="5E5E5E"/>
+                </a:solidFill>
+                <a:latin typeface="Courier"/>
+              </a:rPr>
+              <a:t>!</a:t>
+            </a:r>
+            <a:r>
+              <a:rPr>
+                <a:solidFill>
+                  <a:srgbClr val="4758AB"/>
+                </a:solidFill>
+                <a:latin typeface="Courier"/>
+              </a:rPr>
+              <a:t>is.na</a:t>
+            </a:r>
+            <a:r>
+              <a:rPr>
+                <a:solidFill>
+                  <a:srgbClr val="003B4F"/>
+                </a:solidFill>
+                <a:latin typeface="Courier"/>
+              </a:rPr>
+              <a:t>(x))</a:t>
+            </a:r>
+          </a:p>
+          <a:p>
+            <a:pPr lvl="0" indent="0" marL="0">
+              <a:buNone/>
+            </a:pPr>
+            <a:r>
+              <a:rPr/>
+              <a:t>✏️ </a:t>
+            </a:r>
+            <a:r>
+              <a:rPr b="1"/>
+              <a:t>Your turn:</a:t>
+            </a:r>
+            <a:r>
+              <a:rPr/>
+              <a:t> Explain in your own words why </a:t>
+            </a:r>
+            <a:r>
+              <a:rPr>
+                <a:latin typeface="Courier"/>
+              </a:rPr>
+              <a:t>length(x)</a:t>
+            </a:r>
+            <a:r>
+              <a:rPr/>
+              <a:t> gives the wrong answer for a sample size when there are missing values.</a:t>
+            </a:r>
+          </a:p>
+          <a:p>
+            <a:pPr lvl="0" indent="0">
+              <a:buNone/>
+            </a:pPr>
+            <a:r>
+              <a:rPr>
+                <a:latin typeface="Courier"/>
+              </a:rPr>
+              <a:t>________________________________________________________</a:t>
+            </a:r>
+          </a:p>
+          <a:p>
+            <a:pPr lvl="0" indent="0" marL="0">
+              <a:buNone/>
+            </a:pPr>
+            <a:r>
+              <a:rPr b="1"/>
+              <a:t>▶ Run this:</a:t>
+            </a:r>
+          </a:p>
+          <a:p>
+            <a:pPr lvl="0" indent="0">
+              <a:buNone/>
+            </a:pPr>
+            <a:r>
+              <a:rPr>
+                <a:solidFill>
+                  <a:srgbClr val="003B4F"/>
+                </a:solidFill>
+                <a:latin typeface="Courier"/>
+              </a:rPr>
+              <a:t>wrong_n  &lt;- </a:t>
+            </a:r>
+            <a:r>
+              <a:rPr>
+                <a:solidFill>
+                  <a:srgbClr val="4758AB"/>
+                </a:solidFill>
+                <a:latin typeface="Courier"/>
+              </a:rPr>
+              <a:t>length</a:t>
+            </a:r>
+            <a:r>
+              <a:rPr>
+                <a:solidFill>
+                  <a:srgbClr val="003B4F"/>
+                </a:solidFill>
+                <a:latin typeface="Courier"/>
+              </a:rPr>
+              <a:t>(x)</a:t>
+            </a:r>
+            <a:br/>
+            <a:r>
+              <a:rPr>
+                <a:solidFill>
+                  <a:srgbClr val="003B4F"/>
+                </a:solidFill>
+                <a:latin typeface="Courier"/>
+              </a:rPr>
+              <a:t>wrong_se &lt;- </a:t>
+            </a:r>
+            <a:r>
+              <a:rPr>
+                <a:solidFill>
+                  <a:srgbClr val="4758AB"/>
+                </a:solidFill>
+                <a:latin typeface="Courier"/>
+              </a:rPr>
               <a:t>sd</a:t>
             </a:r>
             <a:r>
@@ -5813,7 +7589,43 @@
                 </a:solidFill>
                 <a:latin typeface="Courier"/>
               </a:rPr>
-              <a:t>(lee_lengths)  </a:t>
+              <a:t>(x, </a:t>
+            </a:r>
+            <a:r>
+              <a:rPr>
+                <a:solidFill>
+                  <a:srgbClr val="657422"/>
+                </a:solidFill>
+                <a:latin typeface="Courier"/>
+              </a:rPr>
+              <a:t>na.rm =</a:t>
+            </a:r>
+            <a:r>
+              <a:rPr>
+                <a:solidFill>
+                  <a:srgbClr val="003B4F"/>
+                </a:solidFill>
+                <a:latin typeface="Courier"/>
+              </a:rPr>
+              <a:t> </a:t>
+            </a:r>
+            <a:r>
+              <a:rPr>
+                <a:solidFill>
+                  <a:srgbClr val="8F5902"/>
+                </a:solidFill>
+                <a:latin typeface="Courier"/>
+              </a:rPr>
+              <a:t>TRUE</a:t>
+            </a:r>
+            <a:r>
+              <a:rPr>
+                <a:solidFill>
+                  <a:srgbClr val="003B4F"/>
+                </a:solidFill>
+                <a:latin typeface="Courier"/>
+              </a:rPr>
+              <a:t>) </a:t>
             </a:r>
             <a:r>
               <a:rPr>
@@ -5849,71 +7661,7 @@
                 </a:solidFill>
                 <a:latin typeface="Courier"/>
               </a:rPr>
-              <a:t>(n_lee)</a:t>
-            </a:r>
-            <a:br/>
-            <a:r>
-              <a:rPr>
-                <a:solidFill>
-                  <a:srgbClr val="003B4F"/>
-                </a:solidFill>
-                <a:latin typeface="Courier"/>
-              </a:rPr>
-              <a:t>se_wind &lt;- </a:t>
-            </a:r>
-            <a:r>
-              <a:rPr>
-                <a:solidFill>
-                  <a:srgbClr val="4758AB"/>
-                </a:solidFill>
-                <a:latin typeface="Courier"/>
-              </a:rPr>
-              <a:t>sd</a:t>
-            </a:r>
-            <a:r>
-              <a:rPr>
-                <a:solidFill>
-                  <a:srgbClr val="003B4F"/>
-                </a:solidFill>
-                <a:latin typeface="Courier"/>
-              </a:rPr>
-              <a:t>(wind_lengths) </a:t>
-            </a:r>
-            <a:r>
-              <a:rPr>
-                <a:solidFill>
-                  <a:srgbClr val="5E5E5E"/>
-                </a:solidFill>
-                <a:latin typeface="Courier"/>
-              </a:rPr>
-              <a:t>/</a:t>
-            </a:r>
-            <a:r>
-              <a:rPr>
-                <a:solidFill>
-                  <a:srgbClr val="003B4F"/>
-                </a:solidFill>
-                <a:latin typeface="Courier"/>
-              </a:rPr>
-              <a:t> </a:t>
-            </a:r>
-            <a:r>
-              <a:rPr>
-                <a:solidFill>
-                  <a:srgbClr val="4758AB"/>
-                </a:solidFill>
-                <a:latin typeface="Courier"/>
-              </a:rPr>
-              <a:t>sqrt</a:t>
-            </a:r>
-            <a:r>
-              <a:rPr>
-                <a:solidFill>
-                  <a:srgbClr val="003B4F"/>
-                </a:solidFill>
-                <a:latin typeface="Courier"/>
-              </a:rPr>
-              <a:t>(n_wind)</a:t>
+              <a:t>(wrong_n)</a:t>
             </a:r>
             <a:br/>
             <a:br/>
@@ -5924,7 +7672,52 @@
                 </a:solidFill>
                 <a:latin typeface="Courier"/>
               </a:rPr>
-              <a:t>se_lee</a:t>
+              <a:t>right_n  &lt;- </a:t>
+            </a:r>
+            <a:r>
+              <a:rPr>
+                <a:solidFill>
+                  <a:srgbClr val="4758AB"/>
+                </a:solidFill>
+                <a:latin typeface="Courier"/>
+              </a:rPr>
+              <a:t>sum</a:t>
+            </a:r>
+            <a:r>
+              <a:rPr>
+                <a:solidFill>
+                  <a:srgbClr val="003B4F"/>
+                </a:solidFill>
+                <a:latin typeface="Courier"/>
+              </a:rPr>
+              <a:t>(</a:t>
+            </a:r>
+            <a:r>
+              <a:rPr>
+                <a:solidFill>
+                  <a:srgbClr val="5E5E5E"/>
+                </a:solidFill>
+                <a:latin typeface="Courier"/>
+              </a:rPr>
+              <a:t>!</a:t>
+            </a:r>
+            <a:r>
+              <a:rPr>
+                <a:solidFill>
+                  <a:srgbClr val="4758AB"/>
+                </a:solidFill>
+                <a:latin typeface="Courier"/>
+              </a:rPr>
+              <a:t>is.na</a:t>
+            </a:r>
+            <a:r>
+              <a:rPr>
+                <a:solidFill>
+                  <a:srgbClr val="003B4F"/>
+                </a:solidFill>
+                <a:latin typeface="Courier"/>
+              </a:rPr>
+              <a:t>(x))</a:t>
             </a:r>
             <a:br/>
             <a:r>
@@ -5934,7 +7727,118 @@
                 </a:solidFill>
                 <a:latin typeface="Courier"/>
               </a:rPr>
-              <a:t>se_wind</a:t>
+              <a:t>right_se &lt;- </a:t>
+            </a:r>
+            <a:r>
+              <a:rPr>
+                <a:solidFill>
+                  <a:srgbClr val="4758AB"/>
+                </a:solidFill>
+                <a:latin typeface="Courier"/>
+              </a:rPr>
+              <a:t>sd</a:t>
+            </a:r>
+            <a:r>
+              <a:rPr>
+                <a:solidFill>
+                  <a:srgbClr val="003B4F"/>
+                </a:solidFill>
+                <a:latin typeface="Courier"/>
+              </a:rPr>
+              <a:t>(x, </a:t>
+            </a:r>
+            <a:r>
+              <a:rPr>
+                <a:solidFill>
+                  <a:srgbClr val="657422"/>
+                </a:solidFill>
+                <a:latin typeface="Courier"/>
+              </a:rPr>
+              <a:t>na.rm =</a:t>
+            </a:r>
+            <a:r>
+              <a:rPr>
+                <a:solidFill>
+                  <a:srgbClr val="003B4F"/>
+                </a:solidFill>
+                <a:latin typeface="Courier"/>
+              </a:rPr>
+              <a:t> </a:t>
+            </a:r>
+            <a:r>
+              <a:rPr>
+                <a:solidFill>
+                  <a:srgbClr val="8F5902"/>
+                </a:solidFill>
+                <a:latin typeface="Courier"/>
+              </a:rPr>
+              <a:t>TRUE</a:t>
+            </a:r>
+            <a:r>
+              <a:rPr>
+                <a:solidFill>
+                  <a:srgbClr val="003B4F"/>
+                </a:solidFill>
+                <a:latin typeface="Courier"/>
+              </a:rPr>
+              <a:t>) </a:t>
+            </a:r>
+            <a:r>
+              <a:rPr>
+                <a:solidFill>
+                  <a:srgbClr val="5E5E5E"/>
+                </a:solidFill>
+                <a:latin typeface="Courier"/>
+              </a:rPr>
+              <a:t>/</a:t>
+            </a:r>
+            <a:r>
+              <a:rPr>
+                <a:solidFill>
+                  <a:srgbClr val="003B4F"/>
+                </a:solidFill>
+                <a:latin typeface="Courier"/>
+              </a:rPr>
+              <a:t> </a:t>
+            </a:r>
+            <a:r>
+              <a:rPr>
+                <a:solidFill>
+                  <a:srgbClr val="4758AB"/>
+                </a:solidFill>
+                <a:latin typeface="Courier"/>
+              </a:rPr>
+              <a:t>sqrt</a:t>
+            </a:r>
+            <a:r>
+              <a:rPr>
+                <a:solidFill>
+                  <a:srgbClr val="003B4F"/>
+                </a:solidFill>
+                <a:latin typeface="Courier"/>
+              </a:rPr>
+              <a:t>(right_n)</a:t>
+            </a:r>
+            <a:br/>
+            <a:br/>
+            <a:r>
+              <a:rPr>
+                <a:solidFill>
+                  <a:srgbClr val="003B4F"/>
+                </a:solidFill>
+                <a:latin typeface="Courier"/>
+              </a:rPr>
+              <a:t>wrong_se</a:t>
+            </a:r>
+            <a:br/>
+            <a:r>
+              <a:rPr>
+                <a:solidFill>
+                  <a:srgbClr val="003B4F"/>
+                </a:solidFill>
+                <a:latin typeface="Courier"/>
+              </a:rPr>
+              <a:t>right_se</a:t>
             </a:r>
           </a:p>
           <a:p>
@@ -5951,18 +7855,95 @@
             </a:r>
             <a:r>
               <a:rPr/>
-              <a:t> In one sentence, explain the difference between what SD tells you and what SE tells you.</a:t>
-            </a:r>
-          </a:p>
-          <a:p>
-            <a:pPr lvl="0" indent="0">
+              <a:t> Are </a:t>
+            </a:r>
+            <a:r>
+              <a:rPr>
+                <a:latin typeface="Courier"/>
+              </a:rPr>
+              <a:t>wrong_se</a:t>
+            </a:r>
+            <a:r>
+              <a:rPr/>
+              <a:t> and </a:t>
+            </a:r>
+            <a:r>
+              <a:rPr>
+                <a:latin typeface="Courier"/>
+              </a:rPr>
+              <a:t>right_se</a:t>
+            </a:r>
+            <a:r>
+              <a:rPr/>
+              <a:t> the same number? Why or why not? </a:t>
+            </a:r>
+            <a:r>
+              <a:rPr>
+                <a:latin typeface="Courier"/>
+              </a:rPr>
+              <a:t>________________________</a:t>
+            </a:r>
+          </a:p>
+          <a:p>
+            <a:pPr lvl="0" indent="0" marL="1270000">
               <a:buNone/>
             </a:pPr>
             <a:r>
-              <a:rPr>
-                <a:latin typeface="Courier"/>
-              </a:rPr>
-              <a:t>________________________________________________________</a:t>
+              <a:rPr sz="2000" b="1"/>
+              <a:t>Tip</a:t>
+            </a:r>
+          </a:p>
+          <a:p>
+            <a:pPr lvl="0" indent="0" marL="1270000">
+              <a:buNone/>
+            </a:pPr>
+            <a:r>
+              <a:rPr sz="2000" b="1"/>
+              <a:t>🚀 If you finish early:</a:t>
+            </a:r>
+            <a:r>
+              <a:rPr sz="2000"/>
+              <a:t> Add a third </a:t>
+            </a:r>
+            <a:r>
+              <a:rPr sz="2000">
+                <a:latin typeface="Courier"/>
+              </a:rPr>
+              <a:t>NA</a:t>
+            </a:r>
+            <a:r>
+              <a:rPr sz="2000"/>
+              <a:t> to </a:t>
+            </a:r>
+            <a:r>
+              <a:rPr sz="2000">
+                <a:latin typeface="Courier"/>
+              </a:rPr>
+              <a:t>x</a:t>
+            </a:r>
+            <a:r>
+              <a:rPr sz="2000"/>
+              <a:t> and rerun both calculations. What happens to </a:t>
+            </a:r>
+            <a:r>
+              <a:rPr sz="2000">
+                <a:latin typeface="Courier"/>
+              </a:rPr>
+              <a:t>wrong_se</a:t>
+            </a:r>
+            <a:r>
+              <a:rPr sz="2000"/>
+              <a:t> and </a:t>
+            </a:r>
+            <a:r>
+              <a:rPr sz="2000">
+                <a:latin typeface="Courier"/>
+              </a:rPr>
+              <a:t>right_se</a:t>
+            </a:r>
+            <a:r>
+              <a:rPr sz="2000"/>
+              <a:t> this time?</a:t>
             </a:r>
           </a:p>
         </p:txBody>
@@ -6014,7 +7995,7 @@
             </a:pPr>
             <a:r>
               <a:rPr/>
-              <a:t>Part 6 · All stats, one group, base R</a:t>
+              <a:t>Part 5 · Standard error, on real data</a:t>
             </a:r>
           </a:p>
         </p:txBody>
@@ -6053,7 +8034,7 @@
                 </a:solidFill>
                 <a:latin typeface="Courier"/>
               </a:rPr>
-              <a:t>n_l    &lt;- </a:t>
+              <a:t>n_lee  &lt;- </a:t>
             </a:r>
             <a:r>
               <a:rPr>
@@ -6108,7 +8089,7 @@
                 </a:solidFill>
                 <a:latin typeface="Courier"/>
               </a:rPr>
-              <a:t>mean_l &lt;- </a:t>
+              <a:t>n_wind &lt;- </a:t>
             </a:r>
             <a:r>
               <a:rPr>
@@ -6117,62 +8098,25 @@
                 </a:solidFill>
                 <a:latin typeface="Courier"/>
               </a:rPr>
-              <a:t>mean</a:t>
-            </a:r>
-            <a:r>
-              <a:rPr>
-                <a:solidFill>
-                  <a:srgbClr val="003B4F"/>
-                </a:solidFill>
-                <a:latin typeface="Courier"/>
-              </a:rPr>
-              <a:t>(lee_lengths, </a:t>
-            </a:r>
-            <a:r>
-              <a:rPr>
-                <a:solidFill>
-                  <a:srgbClr val="657422"/>
-                </a:solidFill>
-                <a:latin typeface="Courier"/>
-              </a:rPr>
-              <a:t>na.rm =</a:t>
-            </a:r>
-            <a:r>
-              <a:rPr>
-                <a:solidFill>
-                  <a:srgbClr val="003B4F"/>
-                </a:solidFill>
-                <a:latin typeface="Courier"/>
-              </a:rPr>
-              <a:t> </a:t>
-            </a:r>
-            <a:r>
-              <a:rPr>
-                <a:solidFill>
-                  <a:srgbClr val="8F5902"/>
-                </a:solidFill>
-                <a:latin typeface="Courier"/>
-              </a:rPr>
-              <a:t>TRUE</a:t>
-            </a:r>
-            <a:r>
-              <a:rPr>
-                <a:solidFill>
-                  <a:srgbClr val="003B4F"/>
-                </a:solidFill>
-                <a:latin typeface="Courier"/>
-              </a:rPr>
-              <a:t>)</a:t>
-            </a:r>
-            <a:br/>
-            <a:r>
-              <a:rPr>
-                <a:solidFill>
-                  <a:srgbClr val="003B4F"/>
-                </a:solidFill>
-                <a:latin typeface="Courier"/>
-              </a:rPr>
-              <a:t>med_l  &lt;- </a:t>
+              <a:t>sum</a:t>
+            </a:r>
+            <a:r>
+              <a:rPr>
+                <a:solidFill>
+                  <a:srgbClr val="003B4F"/>
+                </a:solidFill>
+                <a:latin typeface="Courier"/>
+              </a:rPr>
+              <a:t>(</a:t>
+            </a:r>
+            <a:r>
+              <a:rPr>
+                <a:solidFill>
+                  <a:srgbClr val="5E5E5E"/>
+                </a:solidFill>
+                <a:latin typeface="Courier"/>
+              </a:rPr>
+              <a:t>!</a:t>
             </a:r>
             <a:r>
               <a:rPr>
@@ -6181,218 +8125,63 @@
                 </a:solidFill>
                 <a:latin typeface="Courier"/>
               </a:rPr>
-              <a:t>median</a:t>
-            </a:r>
-            <a:r>
-              <a:rPr>
-                <a:solidFill>
-                  <a:srgbClr val="003B4F"/>
-                </a:solidFill>
-                <a:latin typeface="Courier"/>
-              </a:rPr>
-              <a:t>(lee_lengths, </a:t>
-            </a:r>
-            <a:r>
-              <a:rPr>
-                <a:solidFill>
-                  <a:srgbClr val="657422"/>
-                </a:solidFill>
-                <a:latin typeface="Courier"/>
-              </a:rPr>
-              <a:t>na.rm =</a:t>
-            </a:r>
-            <a:r>
-              <a:rPr>
-                <a:solidFill>
-                  <a:srgbClr val="003B4F"/>
-                </a:solidFill>
-                <a:latin typeface="Courier"/>
-              </a:rPr>
-              <a:t> </a:t>
-            </a:r>
-            <a:r>
-              <a:rPr>
-                <a:solidFill>
-                  <a:srgbClr val="8F5902"/>
-                </a:solidFill>
-                <a:latin typeface="Courier"/>
-              </a:rPr>
-              <a:t>TRUE</a:t>
-            </a:r>
-            <a:r>
-              <a:rPr>
-                <a:solidFill>
-                  <a:srgbClr val="003B4F"/>
-                </a:solidFill>
-                <a:latin typeface="Courier"/>
-              </a:rPr>
-              <a:t>)</a:t>
-            </a:r>
-            <a:br/>
-            <a:r>
-              <a:rPr>
-                <a:solidFill>
-                  <a:srgbClr val="003B4F"/>
-                </a:solidFill>
-                <a:latin typeface="Courier"/>
-              </a:rPr>
-              <a:t>sd_l   &lt;- </a:t>
-            </a:r>
-            <a:r>
-              <a:rPr>
-                <a:solidFill>
-                  <a:srgbClr val="4758AB"/>
-                </a:solidFill>
-                <a:latin typeface="Courier"/>
-              </a:rPr>
-              <a:t>sd</a:t>
-            </a:r>
-            <a:r>
-              <a:rPr>
-                <a:solidFill>
-                  <a:srgbClr val="003B4F"/>
-                </a:solidFill>
-                <a:latin typeface="Courier"/>
-              </a:rPr>
-              <a:t>(lee_lengths, </a:t>
-            </a:r>
-            <a:r>
-              <a:rPr>
-                <a:solidFill>
-                  <a:srgbClr val="657422"/>
-                </a:solidFill>
-                <a:latin typeface="Courier"/>
-              </a:rPr>
-              <a:t>na.rm =</a:t>
-            </a:r>
-            <a:r>
-              <a:rPr>
-                <a:solidFill>
-                  <a:srgbClr val="003B4F"/>
-                </a:solidFill>
-                <a:latin typeface="Courier"/>
-              </a:rPr>
-              <a:t> </a:t>
-            </a:r>
-            <a:r>
-              <a:rPr>
-                <a:solidFill>
-                  <a:srgbClr val="8F5902"/>
-                </a:solidFill>
-                <a:latin typeface="Courier"/>
-              </a:rPr>
-              <a:t>TRUE</a:t>
-            </a:r>
-            <a:r>
-              <a:rPr>
-                <a:solidFill>
-                  <a:srgbClr val="003B4F"/>
-                </a:solidFill>
-                <a:latin typeface="Courier"/>
-              </a:rPr>
-              <a:t>)</a:t>
-            </a:r>
-            <a:br/>
-            <a:r>
-              <a:rPr>
-                <a:solidFill>
-                  <a:srgbClr val="003B4F"/>
-                </a:solidFill>
-                <a:latin typeface="Courier"/>
-              </a:rPr>
-              <a:t>se_l   &lt;- sd_l </a:t>
-            </a:r>
-            <a:r>
-              <a:rPr>
-                <a:solidFill>
-                  <a:srgbClr val="5E5E5E"/>
-                </a:solidFill>
-                <a:latin typeface="Courier"/>
-              </a:rPr>
-              <a:t>/</a:t>
-            </a:r>
-            <a:r>
-              <a:rPr>
-                <a:solidFill>
-                  <a:srgbClr val="003B4F"/>
-                </a:solidFill>
-                <a:latin typeface="Courier"/>
-              </a:rPr>
-              <a:t> </a:t>
-            </a:r>
-            <a:r>
-              <a:rPr>
-                <a:solidFill>
-                  <a:srgbClr val="4758AB"/>
-                </a:solidFill>
-                <a:latin typeface="Courier"/>
-              </a:rPr>
-              <a:t>sqrt</a:t>
-            </a:r>
-            <a:r>
-              <a:rPr>
-                <a:solidFill>
-                  <a:srgbClr val="003B4F"/>
-                </a:solidFill>
-                <a:latin typeface="Courier"/>
-              </a:rPr>
-              <a:t>(n_l)</a:t>
+              <a:t>is.na</a:t>
+            </a:r>
+            <a:r>
+              <a:rPr>
+                <a:solidFill>
+                  <a:srgbClr val="003B4F"/>
+                </a:solidFill>
+                <a:latin typeface="Courier"/>
+              </a:rPr>
+              <a:t>(wind_lengths))</a:t>
             </a:r>
             <a:br/>
             <a:br/>
             <a:r>
               <a:rPr>
                 <a:solidFill>
+                  <a:srgbClr val="003B4F"/>
+                </a:solidFill>
+                <a:latin typeface="Courier"/>
+              </a:rPr>
+              <a:t>se_lee  &lt;- </a:t>
+            </a:r>
+            <a:r>
+              <a:rPr>
+                <a:solidFill>
                   <a:srgbClr val="4758AB"/>
                 </a:solidFill>
                 <a:latin typeface="Courier"/>
               </a:rPr>
-              <a:t>cat</a:t>
-            </a:r>
-            <a:r>
-              <a:rPr>
-                <a:solidFill>
-                  <a:srgbClr val="003B4F"/>
-                </a:solidFill>
-                <a:latin typeface="Courier"/>
-              </a:rPr>
-              <a:t>(</a:t>
-            </a:r>
-            <a:r>
-              <a:rPr>
-                <a:solidFill>
-                  <a:srgbClr val="20794D"/>
-                </a:solidFill>
-                <a:latin typeface="Courier"/>
-              </a:rPr>
-              <a:t>"n ="</a:t>
-            </a:r>
-            <a:r>
-              <a:rPr>
-                <a:solidFill>
-                  <a:srgbClr val="003B4F"/>
-                </a:solidFill>
-                <a:latin typeface="Courier"/>
-              </a:rPr>
-              <a:t>, n_l, </a:t>
-            </a:r>
-            <a:r>
-              <a:rPr>
-                <a:solidFill>
-                  <a:srgbClr val="20794D"/>
-                </a:solidFill>
-                <a:latin typeface="Courier"/>
-              </a:rPr>
-              <a:t>" Mean ="</a:t>
-            </a:r>
-            <a:r>
-              <a:rPr>
-                <a:solidFill>
-                  <a:srgbClr val="003B4F"/>
-                </a:solidFill>
-                <a:latin typeface="Courier"/>
-              </a:rPr>
-              <a:t>, </a:t>
+              <a:t>sd</a:t>
+            </a:r>
+            <a:r>
+              <a:rPr>
+                <a:solidFill>
+                  <a:srgbClr val="003B4F"/>
+                </a:solidFill>
+                <a:latin typeface="Courier"/>
+              </a:rPr>
+              <a:t>(lee_lengths)  </a:t>
+            </a:r>
+            <a:r>
+              <a:rPr>
+                <a:solidFill>
+                  <a:srgbClr val="5E5E5E"/>
+                </a:solidFill>
+                <a:latin typeface="Courier"/>
+              </a:rPr>
+              <a:t>/</a:t>
+            </a:r>
+            <a:r>
+              <a:rPr>
+                <a:solidFill>
+                  <a:srgbClr val="003B4F"/>
+                </a:solidFill>
+                <a:latin typeface="Courier"/>
+              </a:rPr>
+              <a:t> </a:t>
             </a:r>
             <a:r>
               <a:rPr>
@@ -6401,34 +8190,16 @@
                 </a:solidFill>
                 <a:latin typeface="Courier"/>
               </a:rPr>
-              <a:t>round</a:t>
-            </a:r>
-            <a:r>
-              <a:rPr>
-                <a:solidFill>
-                  <a:srgbClr val="003B4F"/>
-                </a:solidFill>
-                <a:latin typeface="Courier"/>
-              </a:rPr>
-              <a:t>(mean_l, </a:t>
-            </a:r>
-            <a:r>
-              <a:rPr>
-                <a:solidFill>
-                  <a:srgbClr val="AD0000"/>
-                </a:solidFill>
-                <a:latin typeface="Courier"/>
-              </a:rPr>
-              <a:t>2</a:t>
-            </a:r>
-            <a:r>
-              <a:rPr>
-                <a:solidFill>
-                  <a:srgbClr val="003B4F"/>
-                </a:solidFill>
-                <a:latin typeface="Courier"/>
-              </a:rPr>
-              <a:t>),</a:t>
+              <a:t>sqrt</a:t>
+            </a:r>
+            <a:r>
+              <a:rPr>
+                <a:solidFill>
+                  <a:srgbClr val="003B4F"/>
+                </a:solidFill>
+                <a:latin typeface="Courier"/>
+              </a:rPr>
+              <a:t>(n_lee)</a:t>
             </a:r>
             <a:br/>
             <a:r>
@@ -6438,25 +8209,7 @@
                 </a:solidFill>
                 <a:latin typeface="Courier"/>
               </a:rPr>
-              <a:t>    </a:t>
-            </a:r>
-            <a:r>
-              <a:rPr>
-                <a:solidFill>
-                  <a:srgbClr val="20794D"/>
-                </a:solidFill>
-                <a:latin typeface="Courier"/>
-              </a:rPr>
-              <a:t>" Median ="</a:t>
-            </a:r>
-            <a:r>
-              <a:rPr>
-                <a:solidFill>
-                  <a:srgbClr val="003B4F"/>
-                </a:solidFill>
-                <a:latin typeface="Courier"/>
-              </a:rPr>
-              <a:t>, </a:t>
+              <a:t>se_wind &lt;- </a:t>
             </a:r>
             <a:r>
               <a:rPr>
@@ -6465,188 +8218,73 @@
                 </a:solidFill>
                 <a:latin typeface="Courier"/>
               </a:rPr>
-              <a:t>round</a:t>
-            </a:r>
-            <a:r>
-              <a:rPr>
-                <a:solidFill>
-                  <a:srgbClr val="003B4F"/>
-                </a:solidFill>
-                <a:latin typeface="Courier"/>
-              </a:rPr>
-              <a:t>(med_l, </a:t>
-            </a:r>
-            <a:r>
-              <a:rPr>
-                <a:solidFill>
-                  <a:srgbClr val="AD0000"/>
-                </a:solidFill>
-                <a:latin typeface="Courier"/>
-              </a:rPr>
-              <a:t>2</a:t>
-            </a:r>
-            <a:r>
-              <a:rPr>
-                <a:solidFill>
-                  <a:srgbClr val="003B4F"/>
-                </a:solidFill>
-                <a:latin typeface="Courier"/>
-              </a:rPr>
-              <a:t>),</a:t>
+              <a:t>sd</a:t>
+            </a:r>
+            <a:r>
+              <a:rPr>
+                <a:solidFill>
+                  <a:srgbClr val="003B4F"/>
+                </a:solidFill>
+                <a:latin typeface="Courier"/>
+              </a:rPr>
+              <a:t>(wind_lengths) </a:t>
+            </a:r>
+            <a:r>
+              <a:rPr>
+                <a:solidFill>
+                  <a:srgbClr val="5E5E5E"/>
+                </a:solidFill>
+                <a:latin typeface="Courier"/>
+              </a:rPr>
+              <a:t>/</a:t>
+            </a:r>
+            <a:r>
+              <a:rPr>
+                <a:solidFill>
+                  <a:srgbClr val="003B4F"/>
+                </a:solidFill>
+                <a:latin typeface="Courier"/>
+              </a:rPr>
+              <a:t> </a:t>
+            </a:r>
+            <a:r>
+              <a:rPr>
+                <a:solidFill>
+                  <a:srgbClr val="4758AB"/>
+                </a:solidFill>
+                <a:latin typeface="Courier"/>
+              </a:rPr>
+              <a:t>sqrt</a:t>
+            </a:r>
+            <a:r>
+              <a:rPr>
+                <a:solidFill>
+                  <a:srgbClr val="003B4F"/>
+                </a:solidFill>
+                <a:latin typeface="Courier"/>
+              </a:rPr>
+              <a:t>(n_wind)</a:t>
             </a:r>
             <a:br/>
-            <a:r>
-              <a:rPr>
-                <a:solidFill>
-                  <a:srgbClr val="003B4F"/>
-                </a:solidFill>
-                <a:latin typeface="Courier"/>
-              </a:rPr>
-              <a:t>    </a:t>
-            </a:r>
-            <a:r>
-              <a:rPr>
-                <a:solidFill>
-                  <a:srgbClr val="20794D"/>
-                </a:solidFill>
-                <a:latin typeface="Courier"/>
-              </a:rPr>
-              <a:t>" SD ="</a:t>
-            </a:r>
-            <a:r>
-              <a:rPr>
-                <a:solidFill>
-                  <a:srgbClr val="003B4F"/>
-                </a:solidFill>
-                <a:latin typeface="Courier"/>
-              </a:rPr>
-              <a:t>, </a:t>
-            </a:r>
-            <a:r>
-              <a:rPr>
-                <a:solidFill>
-                  <a:srgbClr val="4758AB"/>
-                </a:solidFill>
-                <a:latin typeface="Courier"/>
-              </a:rPr>
-              <a:t>round</a:t>
-            </a:r>
-            <a:r>
-              <a:rPr>
-                <a:solidFill>
-                  <a:srgbClr val="003B4F"/>
-                </a:solidFill>
-                <a:latin typeface="Courier"/>
-              </a:rPr>
-              <a:t>(sd_l, </a:t>
-            </a:r>
-            <a:r>
-              <a:rPr>
-                <a:solidFill>
-                  <a:srgbClr val="AD0000"/>
-                </a:solidFill>
-                <a:latin typeface="Courier"/>
-              </a:rPr>
-              <a:t>2</a:t>
-            </a:r>
-            <a:r>
-              <a:rPr>
-                <a:solidFill>
-                  <a:srgbClr val="003B4F"/>
-                </a:solidFill>
-                <a:latin typeface="Courier"/>
-              </a:rPr>
-              <a:t>), </a:t>
-            </a:r>
-            <a:r>
-              <a:rPr>
-                <a:solidFill>
-                  <a:srgbClr val="20794D"/>
-                </a:solidFill>
-                <a:latin typeface="Courier"/>
-              </a:rPr>
-              <a:t>" SE ="</a:t>
-            </a:r>
-            <a:r>
-              <a:rPr>
-                <a:solidFill>
-                  <a:srgbClr val="003B4F"/>
-                </a:solidFill>
-                <a:latin typeface="Courier"/>
-              </a:rPr>
-              <a:t>, </a:t>
-            </a:r>
-            <a:r>
-              <a:rPr>
-                <a:solidFill>
-                  <a:srgbClr val="4758AB"/>
-                </a:solidFill>
-                <a:latin typeface="Courier"/>
-              </a:rPr>
-              <a:t>round</a:t>
-            </a:r>
-            <a:r>
-              <a:rPr>
-                <a:solidFill>
-                  <a:srgbClr val="003B4F"/>
-                </a:solidFill>
-                <a:latin typeface="Courier"/>
-              </a:rPr>
-              <a:t>(se_l, </a:t>
-            </a:r>
-            <a:r>
-              <a:rPr>
-                <a:solidFill>
-                  <a:srgbClr val="AD0000"/>
-                </a:solidFill>
-                <a:latin typeface="Courier"/>
-              </a:rPr>
-              <a:t>2</a:t>
-            </a:r>
-            <a:r>
-              <a:rPr>
-                <a:solidFill>
-                  <a:srgbClr val="003B4F"/>
-                </a:solidFill>
-                <a:latin typeface="Courier"/>
-              </a:rPr>
-              <a:t>), </a:t>
-            </a:r>
-            <a:r>
-              <a:rPr>
-                <a:solidFill>
-                  <a:srgbClr val="20794D"/>
-                </a:solidFill>
-                <a:latin typeface="Courier"/>
-              </a:rPr>
-              <a:t>"</a:t>
-            </a:r>
-            <a:r>
-              <a:rPr>
-                <a:solidFill>
-                  <a:srgbClr val="5E5E5E"/>
-                </a:solidFill>
-                <a:latin typeface="Courier"/>
-              </a:rPr>
-              <a:t>\n</a:t>
-            </a:r>
-            <a:r>
-              <a:rPr>
-                <a:solidFill>
-                  <a:srgbClr val="20794D"/>
-                </a:solidFill>
-                <a:latin typeface="Courier"/>
-              </a:rPr>
-              <a:t>"</a:t>
-            </a:r>
-            <a:r>
-              <a:rPr>
-                <a:solidFill>
-                  <a:srgbClr val="003B4F"/>
-                </a:solidFill>
-                <a:latin typeface="Courier"/>
-              </a:rPr>
-              <a:t>)</a:t>
+            <a:br/>
+            <a:r>
+              <a:rPr>
+                <a:solidFill>
+                  <a:srgbClr val="003B4F"/>
+                </a:solidFill>
+                <a:latin typeface="Courier"/>
+              </a:rPr>
+              <a:t>se_lee</a:t>
+            </a:r>
+            <a:br/>
+            <a:r>
+              <a:rPr>
+                <a:solidFill>
+                  <a:srgbClr val="003B4F"/>
+                </a:solidFill>
+                <a:latin typeface="Courier"/>
+              </a:rPr>
+              <a:t>se_wind</a:t>
             </a:r>
           </a:p>
           <a:p>
@@ -6663,17 +8301,7 @@
             </a:r>
             <a:r>
               <a:rPr/>
-              <a:t> Copy this block and adapt it to compute the same five numbers for </a:t>
-            </a:r>
-            <a:r>
-              <a:rPr>
-                <a:latin typeface="Courier"/>
-              </a:rPr>
-              <a:t>wind_lengths</a:t>
-            </a:r>
-            <a:r>
-              <a:rPr/>
-              <a:t>.</a:t>
+              <a:t> In one sentence, explain the difference between what SD tells you and what SE tells you.</a:t>
             </a:r>
           </a:p>
           <a:p>
@@ -6682,12 +8310,9 @@
             </a:pPr>
             <a:r>
               <a:rPr>
-                <a:solidFill>
-                  <a:srgbClr val="5E5E5E"/>
-                </a:solidFill>
-                <a:latin typeface="Courier"/>
-              </a:rPr>
-              <a:t># Write your code here:</a:t>
+                <a:latin typeface="Courier"/>
+              </a:rPr>
+              <a:t>________________________________________________________</a:t>
             </a:r>
           </a:p>
         </p:txBody>
@@ -6739,23 +8364,7 @@
             </a:pPr>
             <a:r>
               <a:rPr/>
-              <a:t>Part 7 · Tidy group stats — </a:t>
-            </a:r>
-            <a:r>
-              <a:rPr>
-                <a:latin typeface="Courier"/>
-              </a:rPr>
-              <a:t>group_by()</a:t>
-            </a:r>
-            <a:r>
-              <a:rPr/>
-              <a:t> + </a:t>
-            </a:r>
-            <a:r>
-              <a:rPr>
-                <a:latin typeface="Courier"/>
-              </a:rPr>
-              <a:t>summarize()</a:t>
+              <a:t>Part 6 · All stats, one group, base R</a:t>
             </a:r>
           </a:p>
         </p:txBody>
@@ -6794,7 +8403,25 @@
                 </a:solidFill>
                 <a:latin typeface="Courier"/>
               </a:rPr>
-              <a:t>side_stats_df &lt;- pine_df </a:t>
+              <a:t>n_l    &lt;- </a:t>
+            </a:r>
+            <a:r>
+              <a:rPr>
+                <a:solidFill>
+                  <a:srgbClr val="4758AB"/>
+                </a:solidFill>
+                <a:latin typeface="Courier"/>
+              </a:rPr>
+              <a:t>sum</a:t>
+            </a:r>
+            <a:r>
+              <a:rPr>
+                <a:solidFill>
+                  <a:srgbClr val="003B4F"/>
+                </a:solidFill>
+                <a:latin typeface="Courier"/>
+              </a:rPr>
+              <a:t>(</a:t>
             </a:r>
             <a:r>
               <a:rPr>
@@ -6803,7 +8430,25 @@
                 </a:solidFill>
                 <a:latin typeface="Courier"/>
               </a:rPr>
-              <a:t>|&gt;</a:t>
+              <a:t>!</a:t>
+            </a:r>
+            <a:r>
+              <a:rPr>
+                <a:solidFill>
+                  <a:srgbClr val="4758AB"/>
+                </a:solidFill>
+                <a:latin typeface="Courier"/>
+              </a:rPr>
+              <a:t>is.na</a:t>
+            </a:r>
+            <a:r>
+              <a:rPr>
+                <a:solidFill>
+                  <a:srgbClr val="003B4F"/>
+                </a:solidFill>
+                <a:latin typeface="Courier"/>
+              </a:rPr>
+              <a:t>(lee_lengths))</a:t>
             </a:r>
             <a:br/>
             <a:r>
@@ -6813,7 +8458,7 @@
                 </a:solidFill>
                 <a:latin typeface="Courier"/>
               </a:rPr>
-              <a:t>  </a:t>
+              <a:t>mean_l &lt;- </a:t>
             </a:r>
             <a:r>
               <a:rPr>
@@ -6822,16 +8467,190 @@
                 </a:solidFill>
                 <a:latin typeface="Courier"/>
               </a:rPr>
-              <a:t>group_by</a:t>
-            </a:r>
-            <a:r>
-              <a:rPr>
-                <a:solidFill>
-                  <a:srgbClr val="003B4F"/>
-                </a:solidFill>
-                <a:latin typeface="Courier"/>
-              </a:rPr>
-              <a:t>(n_s) </a:t>
+              <a:t>mean</a:t>
+            </a:r>
+            <a:r>
+              <a:rPr>
+                <a:solidFill>
+                  <a:srgbClr val="003B4F"/>
+                </a:solidFill>
+                <a:latin typeface="Courier"/>
+              </a:rPr>
+              <a:t>(lee_lengths, </a:t>
+            </a:r>
+            <a:r>
+              <a:rPr>
+                <a:solidFill>
+                  <a:srgbClr val="657422"/>
+                </a:solidFill>
+                <a:latin typeface="Courier"/>
+              </a:rPr>
+              <a:t>na.rm =</a:t>
+            </a:r>
+            <a:r>
+              <a:rPr>
+                <a:solidFill>
+                  <a:srgbClr val="003B4F"/>
+                </a:solidFill>
+                <a:latin typeface="Courier"/>
+              </a:rPr>
+              <a:t> </a:t>
+            </a:r>
+            <a:r>
+              <a:rPr>
+                <a:solidFill>
+                  <a:srgbClr val="8F5902"/>
+                </a:solidFill>
+                <a:latin typeface="Courier"/>
+              </a:rPr>
+              <a:t>TRUE</a:t>
+            </a:r>
+            <a:r>
+              <a:rPr>
+                <a:solidFill>
+                  <a:srgbClr val="003B4F"/>
+                </a:solidFill>
+                <a:latin typeface="Courier"/>
+              </a:rPr>
+              <a:t>)</a:t>
+            </a:r>
+            <a:br/>
+            <a:r>
+              <a:rPr>
+                <a:solidFill>
+                  <a:srgbClr val="003B4F"/>
+                </a:solidFill>
+                <a:latin typeface="Courier"/>
+              </a:rPr>
+              <a:t>med_l  &lt;- </a:t>
+            </a:r>
+            <a:r>
+              <a:rPr>
+                <a:solidFill>
+                  <a:srgbClr val="4758AB"/>
+                </a:solidFill>
+                <a:latin typeface="Courier"/>
+              </a:rPr>
+              <a:t>median</a:t>
+            </a:r>
+            <a:r>
+              <a:rPr>
+                <a:solidFill>
+                  <a:srgbClr val="003B4F"/>
+                </a:solidFill>
+                <a:latin typeface="Courier"/>
+              </a:rPr>
+              <a:t>(lee_lengths, </a:t>
+            </a:r>
+            <a:r>
+              <a:rPr>
+                <a:solidFill>
+                  <a:srgbClr val="657422"/>
+                </a:solidFill>
+                <a:latin typeface="Courier"/>
+              </a:rPr>
+              <a:t>na.rm =</a:t>
+            </a:r>
+            <a:r>
+              <a:rPr>
+                <a:solidFill>
+                  <a:srgbClr val="003B4F"/>
+                </a:solidFill>
+                <a:latin typeface="Courier"/>
+              </a:rPr>
+              <a:t> </a:t>
+            </a:r>
+            <a:r>
+              <a:rPr>
+                <a:solidFill>
+                  <a:srgbClr val="8F5902"/>
+                </a:solidFill>
+                <a:latin typeface="Courier"/>
+              </a:rPr>
+              <a:t>TRUE</a:t>
+            </a:r>
+            <a:r>
+              <a:rPr>
+                <a:solidFill>
+                  <a:srgbClr val="003B4F"/>
+                </a:solidFill>
+                <a:latin typeface="Courier"/>
+              </a:rPr>
+              <a:t>)</a:t>
+            </a:r>
+            <a:br/>
+            <a:r>
+              <a:rPr>
+                <a:solidFill>
+                  <a:srgbClr val="003B4F"/>
+                </a:solidFill>
+                <a:latin typeface="Courier"/>
+              </a:rPr>
+              <a:t>sd_l   &lt;- </a:t>
+            </a:r>
+            <a:r>
+              <a:rPr>
+                <a:solidFill>
+                  <a:srgbClr val="4758AB"/>
+                </a:solidFill>
+                <a:latin typeface="Courier"/>
+              </a:rPr>
+              <a:t>sd</a:t>
+            </a:r>
+            <a:r>
+              <a:rPr>
+                <a:solidFill>
+                  <a:srgbClr val="003B4F"/>
+                </a:solidFill>
+                <a:latin typeface="Courier"/>
+              </a:rPr>
+              <a:t>(lee_lengths, </a:t>
+            </a:r>
+            <a:r>
+              <a:rPr>
+                <a:solidFill>
+                  <a:srgbClr val="657422"/>
+                </a:solidFill>
+                <a:latin typeface="Courier"/>
+              </a:rPr>
+              <a:t>na.rm =</a:t>
+            </a:r>
+            <a:r>
+              <a:rPr>
+                <a:solidFill>
+                  <a:srgbClr val="003B4F"/>
+                </a:solidFill>
+                <a:latin typeface="Courier"/>
+              </a:rPr>
+              <a:t> </a:t>
+            </a:r>
+            <a:r>
+              <a:rPr>
+                <a:solidFill>
+                  <a:srgbClr val="8F5902"/>
+                </a:solidFill>
+                <a:latin typeface="Courier"/>
+              </a:rPr>
+              <a:t>TRUE</a:t>
+            </a:r>
+            <a:r>
+              <a:rPr>
+                <a:solidFill>
+                  <a:srgbClr val="003B4F"/>
+                </a:solidFill>
+                <a:latin typeface="Courier"/>
+              </a:rPr>
+              <a:t>)</a:t>
+            </a:r>
+            <a:br/>
+            <a:r>
+              <a:rPr>
+                <a:solidFill>
+                  <a:srgbClr val="003B4F"/>
+                </a:solidFill>
+                <a:latin typeface="Courier"/>
+              </a:rPr>
+              <a:t>se_l   &lt;- sd_l </a:t>
             </a:r>
             <a:r>
               <a:rPr>
@@ -6840,17 +8659,16 @@
                 </a:solidFill>
                 <a:latin typeface="Courier"/>
               </a:rPr>
-              <a:t>|&gt;</a:t>
-            </a:r>
-            <a:br/>
-            <a:r>
-              <a:rPr>
-                <a:solidFill>
-                  <a:srgbClr val="003B4F"/>
-                </a:solidFill>
-                <a:latin typeface="Courier"/>
-              </a:rPr>
-              <a:t>  </a:t>
+              <a:t>/</a:t>
+            </a:r>
+            <a:r>
+              <a:rPr>
+                <a:solidFill>
+                  <a:srgbClr val="003B4F"/>
+                </a:solidFill>
+                <a:latin typeface="Courier"/>
+              </a:rPr>
+              <a:t> </a:t>
             </a:r>
             <a:r>
               <a:rPr>
@@ -6859,515 +8677,6 @@
                 </a:solidFill>
                 <a:latin typeface="Courier"/>
               </a:rPr>
-              <a:t>summarize</a:t>
-            </a:r>
-            <a:r>
-              <a:rPr>
-                <a:solidFill>
-                  <a:srgbClr val="003B4F"/>
-                </a:solidFill>
-                <a:latin typeface="Courier"/>
-              </a:rPr>
-              <a:t>(</a:t>
-            </a:r>
-            <a:br/>
-            <a:r>
-              <a:rPr>
-                <a:solidFill>
-                  <a:srgbClr val="003B4F"/>
-                </a:solidFill>
-                <a:latin typeface="Courier"/>
-              </a:rPr>
-              <a:t>    </a:t>
-            </a:r>
-            <a:r>
-              <a:rPr>
-                <a:solidFill>
-                  <a:srgbClr val="657422"/>
-                </a:solidFill>
-                <a:latin typeface="Courier"/>
-              </a:rPr>
-              <a:t>n       =</a:t>
-            </a:r>
-            <a:r>
-              <a:rPr>
-                <a:solidFill>
-                  <a:srgbClr val="003B4F"/>
-                </a:solidFill>
-                <a:latin typeface="Courier"/>
-              </a:rPr>
-              <a:t> </a:t>
-            </a:r>
-            <a:r>
-              <a:rPr>
-                <a:solidFill>
-                  <a:srgbClr val="4758AB"/>
-                </a:solidFill>
-                <a:latin typeface="Courier"/>
-              </a:rPr>
-              <a:t>sum</a:t>
-            </a:r>
-            <a:r>
-              <a:rPr>
-                <a:solidFill>
-                  <a:srgbClr val="003B4F"/>
-                </a:solidFill>
-                <a:latin typeface="Courier"/>
-              </a:rPr>
-              <a:t>(</a:t>
-            </a:r>
-            <a:r>
-              <a:rPr>
-                <a:solidFill>
-                  <a:srgbClr val="5E5E5E"/>
-                </a:solidFill>
-                <a:latin typeface="Courier"/>
-              </a:rPr>
-              <a:t>!</a:t>
-            </a:r>
-            <a:r>
-              <a:rPr>
-                <a:solidFill>
-                  <a:srgbClr val="4758AB"/>
-                </a:solidFill>
-                <a:latin typeface="Courier"/>
-              </a:rPr>
-              <a:t>is.na</a:t>
-            </a:r>
-            <a:r>
-              <a:rPr>
-                <a:solidFill>
-                  <a:srgbClr val="003B4F"/>
-                </a:solidFill>
-                <a:latin typeface="Courier"/>
-              </a:rPr>
-              <a:t>(length_mm)),</a:t>
-            </a:r>
-            <a:br/>
-            <a:r>
-              <a:rPr>
-                <a:solidFill>
-                  <a:srgbClr val="003B4F"/>
-                </a:solidFill>
-                <a:latin typeface="Courier"/>
-              </a:rPr>
-              <a:t>    </a:t>
-            </a:r>
-            <a:r>
-              <a:rPr>
-                <a:solidFill>
-                  <a:srgbClr val="657422"/>
-                </a:solidFill>
-                <a:latin typeface="Courier"/>
-              </a:rPr>
-              <a:t>mean_mm =</a:t>
-            </a:r>
-            <a:r>
-              <a:rPr>
-                <a:solidFill>
-                  <a:srgbClr val="003B4F"/>
-                </a:solidFill>
-                <a:latin typeface="Courier"/>
-              </a:rPr>
-              <a:t> </a:t>
-            </a:r>
-            <a:r>
-              <a:rPr>
-                <a:solidFill>
-                  <a:srgbClr val="4758AB"/>
-                </a:solidFill>
-                <a:latin typeface="Courier"/>
-              </a:rPr>
-              <a:t>round</a:t>
-            </a:r>
-            <a:r>
-              <a:rPr>
-                <a:solidFill>
-                  <a:srgbClr val="003B4F"/>
-                </a:solidFill>
-                <a:latin typeface="Courier"/>
-              </a:rPr>
-              <a:t>(</a:t>
-            </a:r>
-            <a:r>
-              <a:rPr>
-                <a:solidFill>
-                  <a:srgbClr val="4758AB"/>
-                </a:solidFill>
-                <a:latin typeface="Courier"/>
-              </a:rPr>
-              <a:t>mean</a:t>
-            </a:r>
-            <a:r>
-              <a:rPr>
-                <a:solidFill>
-                  <a:srgbClr val="003B4F"/>
-                </a:solidFill>
-                <a:latin typeface="Courier"/>
-              </a:rPr>
-              <a:t>(length_mm, </a:t>
-            </a:r>
-            <a:r>
-              <a:rPr>
-                <a:solidFill>
-                  <a:srgbClr val="657422"/>
-                </a:solidFill>
-                <a:latin typeface="Courier"/>
-              </a:rPr>
-              <a:t>na.rm =</a:t>
-            </a:r>
-            <a:r>
-              <a:rPr>
-                <a:solidFill>
-                  <a:srgbClr val="003B4F"/>
-                </a:solidFill>
-                <a:latin typeface="Courier"/>
-              </a:rPr>
-              <a:t> </a:t>
-            </a:r>
-            <a:r>
-              <a:rPr>
-                <a:solidFill>
-                  <a:srgbClr val="8F5902"/>
-                </a:solidFill>
-                <a:latin typeface="Courier"/>
-              </a:rPr>
-              <a:t>TRUE</a:t>
-            </a:r>
-            <a:r>
-              <a:rPr>
-                <a:solidFill>
-                  <a:srgbClr val="003B4F"/>
-                </a:solidFill>
-                <a:latin typeface="Courier"/>
-              </a:rPr>
-              <a:t>), </a:t>
-            </a:r>
-            <a:r>
-              <a:rPr>
-                <a:solidFill>
-                  <a:srgbClr val="AD0000"/>
-                </a:solidFill>
-                <a:latin typeface="Courier"/>
-              </a:rPr>
-              <a:t>2</a:t>
-            </a:r>
-            <a:r>
-              <a:rPr>
-                <a:solidFill>
-                  <a:srgbClr val="003B4F"/>
-                </a:solidFill>
-                <a:latin typeface="Courier"/>
-              </a:rPr>
-              <a:t>),</a:t>
-            </a:r>
-            <a:br/>
-            <a:r>
-              <a:rPr>
-                <a:solidFill>
-                  <a:srgbClr val="003B4F"/>
-                </a:solidFill>
-                <a:latin typeface="Courier"/>
-              </a:rPr>
-              <a:t>    </a:t>
-            </a:r>
-            <a:r>
-              <a:rPr>
-                <a:solidFill>
-                  <a:srgbClr val="657422"/>
-                </a:solidFill>
-                <a:latin typeface="Courier"/>
-              </a:rPr>
-              <a:t>med_mm  =</a:t>
-            </a:r>
-            <a:r>
-              <a:rPr>
-                <a:solidFill>
-                  <a:srgbClr val="003B4F"/>
-                </a:solidFill>
-                <a:latin typeface="Courier"/>
-              </a:rPr>
-              <a:t> </a:t>
-            </a:r>
-            <a:r>
-              <a:rPr>
-                <a:solidFill>
-                  <a:srgbClr val="4758AB"/>
-                </a:solidFill>
-                <a:latin typeface="Courier"/>
-              </a:rPr>
-              <a:t>round</a:t>
-            </a:r>
-            <a:r>
-              <a:rPr>
-                <a:solidFill>
-                  <a:srgbClr val="003B4F"/>
-                </a:solidFill>
-                <a:latin typeface="Courier"/>
-              </a:rPr>
-              <a:t>(</a:t>
-            </a:r>
-            <a:r>
-              <a:rPr>
-                <a:solidFill>
-                  <a:srgbClr val="4758AB"/>
-                </a:solidFill>
-                <a:latin typeface="Courier"/>
-              </a:rPr>
-              <a:t>median</a:t>
-            </a:r>
-            <a:r>
-              <a:rPr>
-                <a:solidFill>
-                  <a:srgbClr val="003B4F"/>
-                </a:solidFill>
-                <a:latin typeface="Courier"/>
-              </a:rPr>
-              <a:t>(length_mm, </a:t>
-            </a:r>
-            <a:r>
-              <a:rPr>
-                <a:solidFill>
-                  <a:srgbClr val="657422"/>
-                </a:solidFill>
-                <a:latin typeface="Courier"/>
-              </a:rPr>
-              <a:t>na.rm =</a:t>
-            </a:r>
-            <a:r>
-              <a:rPr>
-                <a:solidFill>
-                  <a:srgbClr val="003B4F"/>
-                </a:solidFill>
-                <a:latin typeface="Courier"/>
-              </a:rPr>
-              <a:t> </a:t>
-            </a:r>
-            <a:r>
-              <a:rPr>
-                <a:solidFill>
-                  <a:srgbClr val="8F5902"/>
-                </a:solidFill>
-                <a:latin typeface="Courier"/>
-              </a:rPr>
-              <a:t>TRUE</a:t>
-            </a:r>
-            <a:r>
-              <a:rPr>
-                <a:solidFill>
-                  <a:srgbClr val="003B4F"/>
-                </a:solidFill>
-                <a:latin typeface="Courier"/>
-              </a:rPr>
-              <a:t>), </a:t>
-            </a:r>
-            <a:r>
-              <a:rPr>
-                <a:solidFill>
-                  <a:srgbClr val="AD0000"/>
-                </a:solidFill>
-                <a:latin typeface="Courier"/>
-              </a:rPr>
-              <a:t>2</a:t>
-            </a:r>
-            <a:r>
-              <a:rPr>
-                <a:solidFill>
-                  <a:srgbClr val="003B4F"/>
-                </a:solidFill>
-                <a:latin typeface="Courier"/>
-              </a:rPr>
-              <a:t>),</a:t>
-            </a:r>
-            <a:br/>
-            <a:r>
-              <a:rPr>
-                <a:solidFill>
-                  <a:srgbClr val="003B4F"/>
-                </a:solidFill>
-                <a:latin typeface="Courier"/>
-              </a:rPr>
-              <a:t>    </a:t>
-            </a:r>
-            <a:r>
-              <a:rPr>
-                <a:solidFill>
-                  <a:srgbClr val="657422"/>
-                </a:solidFill>
-                <a:latin typeface="Courier"/>
-              </a:rPr>
-              <a:t>sd_mm   =</a:t>
-            </a:r>
-            <a:r>
-              <a:rPr>
-                <a:solidFill>
-                  <a:srgbClr val="003B4F"/>
-                </a:solidFill>
-                <a:latin typeface="Courier"/>
-              </a:rPr>
-              <a:t> </a:t>
-            </a:r>
-            <a:r>
-              <a:rPr>
-                <a:solidFill>
-                  <a:srgbClr val="4758AB"/>
-                </a:solidFill>
-                <a:latin typeface="Courier"/>
-              </a:rPr>
-              <a:t>round</a:t>
-            </a:r>
-            <a:r>
-              <a:rPr>
-                <a:solidFill>
-                  <a:srgbClr val="003B4F"/>
-                </a:solidFill>
-                <a:latin typeface="Courier"/>
-              </a:rPr>
-              <a:t>(</a:t>
-            </a:r>
-            <a:r>
-              <a:rPr>
-                <a:solidFill>
-                  <a:srgbClr val="4758AB"/>
-                </a:solidFill>
-                <a:latin typeface="Courier"/>
-              </a:rPr>
-              <a:t>sd</a:t>
-            </a:r>
-            <a:r>
-              <a:rPr>
-                <a:solidFill>
-                  <a:srgbClr val="003B4F"/>
-                </a:solidFill>
-                <a:latin typeface="Courier"/>
-              </a:rPr>
-              <a:t>(length_mm, </a:t>
-            </a:r>
-            <a:r>
-              <a:rPr>
-                <a:solidFill>
-                  <a:srgbClr val="657422"/>
-                </a:solidFill>
-                <a:latin typeface="Courier"/>
-              </a:rPr>
-              <a:t>na.rm =</a:t>
-            </a:r>
-            <a:r>
-              <a:rPr>
-                <a:solidFill>
-                  <a:srgbClr val="003B4F"/>
-                </a:solidFill>
-                <a:latin typeface="Courier"/>
-              </a:rPr>
-              <a:t> </a:t>
-            </a:r>
-            <a:r>
-              <a:rPr>
-                <a:solidFill>
-                  <a:srgbClr val="8F5902"/>
-                </a:solidFill>
-                <a:latin typeface="Courier"/>
-              </a:rPr>
-              <a:t>TRUE</a:t>
-            </a:r>
-            <a:r>
-              <a:rPr>
-                <a:solidFill>
-                  <a:srgbClr val="003B4F"/>
-                </a:solidFill>
-                <a:latin typeface="Courier"/>
-              </a:rPr>
-              <a:t>), </a:t>
-            </a:r>
-            <a:r>
-              <a:rPr>
-                <a:solidFill>
-                  <a:srgbClr val="AD0000"/>
-                </a:solidFill>
-                <a:latin typeface="Courier"/>
-              </a:rPr>
-              <a:t>2</a:t>
-            </a:r>
-            <a:r>
-              <a:rPr>
-                <a:solidFill>
-                  <a:srgbClr val="003B4F"/>
-                </a:solidFill>
-                <a:latin typeface="Courier"/>
-              </a:rPr>
-              <a:t>),</a:t>
-            </a:r>
-            <a:br/>
-            <a:r>
-              <a:rPr>
-                <a:solidFill>
-                  <a:srgbClr val="003B4F"/>
-                </a:solidFill>
-                <a:latin typeface="Courier"/>
-              </a:rPr>
-              <a:t>    </a:t>
-            </a:r>
-            <a:r>
-              <a:rPr>
-                <a:solidFill>
-                  <a:srgbClr val="657422"/>
-                </a:solidFill>
-                <a:latin typeface="Courier"/>
-              </a:rPr>
-              <a:t>se_mm   =</a:t>
-            </a:r>
-            <a:r>
-              <a:rPr>
-                <a:solidFill>
-                  <a:srgbClr val="003B4F"/>
-                </a:solidFill>
-                <a:latin typeface="Courier"/>
-              </a:rPr>
-              <a:t> </a:t>
-            </a:r>
-            <a:r>
-              <a:rPr>
-                <a:solidFill>
-                  <a:srgbClr val="4758AB"/>
-                </a:solidFill>
-                <a:latin typeface="Courier"/>
-              </a:rPr>
-              <a:t>round</a:t>
-            </a:r>
-            <a:r>
-              <a:rPr>
-                <a:solidFill>
-                  <a:srgbClr val="003B4F"/>
-                </a:solidFill>
-                <a:latin typeface="Courier"/>
-              </a:rPr>
-              <a:t>(sd_mm </a:t>
-            </a:r>
-            <a:r>
-              <a:rPr>
-                <a:solidFill>
-                  <a:srgbClr val="5E5E5E"/>
-                </a:solidFill>
-                <a:latin typeface="Courier"/>
-              </a:rPr>
-              <a:t>/</a:t>
-            </a:r>
-            <a:r>
-              <a:rPr>
-                <a:solidFill>
-                  <a:srgbClr val="003B4F"/>
-                </a:solidFill>
-                <a:latin typeface="Courier"/>
-              </a:rPr>
-              <a:t> </a:t>
-            </a:r>
-            <a:r>
-              <a:rPr>
-                <a:solidFill>
-                  <a:srgbClr val="4758AB"/>
-                </a:solidFill>
-                <a:latin typeface="Courier"/>
-              </a:rPr>
               <a:t>sqrt</a:t>
             </a:r>
             <a:r>
@@ -7377,46 +8686,317 @@
                 </a:solidFill>
                 <a:latin typeface="Courier"/>
               </a:rPr>
-              <a:t>(n), </a:t>
-            </a:r>
-            <a:r>
-              <a:rPr>
-                <a:solidFill>
-                  <a:srgbClr val="AD0000"/>
-                </a:solidFill>
-                <a:latin typeface="Courier"/>
-              </a:rPr>
-              <a:t>2</a:t>
-            </a:r>
-            <a:r>
-              <a:rPr>
-                <a:solidFill>
-                  <a:srgbClr val="003B4F"/>
-                </a:solidFill>
-                <a:latin typeface="Courier"/>
-              </a:rPr>
-              <a:t>)</a:t>
-            </a:r>
-            <a:br/>
-            <a:r>
-              <a:rPr>
-                <a:solidFill>
-                  <a:srgbClr val="003B4F"/>
-                </a:solidFill>
-                <a:latin typeface="Courier"/>
-              </a:rPr>
-              <a:t>  )</a:t>
+              <a:t>(n_l)</a:t>
             </a:r>
             <a:br/>
             <a:br/>
             <a:r>
               <a:rPr>
                 <a:solidFill>
-                  <a:srgbClr val="003B4F"/>
-                </a:solidFill>
-                <a:latin typeface="Courier"/>
-              </a:rPr>
-              <a:t>side_stats_df</a:t>
+                  <a:srgbClr val="4758AB"/>
+                </a:solidFill>
+                <a:latin typeface="Courier"/>
+              </a:rPr>
+              <a:t>cat</a:t>
+            </a:r>
+            <a:r>
+              <a:rPr>
+                <a:solidFill>
+                  <a:srgbClr val="003B4F"/>
+                </a:solidFill>
+                <a:latin typeface="Courier"/>
+              </a:rPr>
+              <a:t>(</a:t>
+            </a:r>
+            <a:r>
+              <a:rPr>
+                <a:solidFill>
+                  <a:srgbClr val="20794D"/>
+                </a:solidFill>
+                <a:latin typeface="Courier"/>
+              </a:rPr>
+              <a:t>"n ="</a:t>
+            </a:r>
+            <a:r>
+              <a:rPr>
+                <a:solidFill>
+                  <a:srgbClr val="003B4F"/>
+                </a:solidFill>
+                <a:latin typeface="Courier"/>
+              </a:rPr>
+              <a:t>, n_l, </a:t>
+            </a:r>
+            <a:r>
+              <a:rPr>
+                <a:solidFill>
+                  <a:srgbClr val="20794D"/>
+                </a:solidFill>
+                <a:latin typeface="Courier"/>
+              </a:rPr>
+              <a:t>" Mean ="</a:t>
+            </a:r>
+            <a:r>
+              <a:rPr>
+                <a:solidFill>
+                  <a:srgbClr val="003B4F"/>
+                </a:solidFill>
+                <a:latin typeface="Courier"/>
+              </a:rPr>
+              <a:t>, </a:t>
+            </a:r>
+            <a:r>
+              <a:rPr>
+                <a:solidFill>
+                  <a:srgbClr val="4758AB"/>
+                </a:solidFill>
+                <a:latin typeface="Courier"/>
+              </a:rPr>
+              <a:t>round</a:t>
+            </a:r>
+            <a:r>
+              <a:rPr>
+                <a:solidFill>
+                  <a:srgbClr val="003B4F"/>
+                </a:solidFill>
+                <a:latin typeface="Courier"/>
+              </a:rPr>
+              <a:t>(mean_l, </a:t>
+            </a:r>
+            <a:r>
+              <a:rPr>
+                <a:solidFill>
+                  <a:srgbClr val="AD0000"/>
+                </a:solidFill>
+                <a:latin typeface="Courier"/>
+              </a:rPr>
+              <a:t>2</a:t>
+            </a:r>
+            <a:r>
+              <a:rPr>
+                <a:solidFill>
+                  <a:srgbClr val="003B4F"/>
+                </a:solidFill>
+                <a:latin typeface="Courier"/>
+              </a:rPr>
+              <a:t>),</a:t>
+            </a:r>
+            <a:br/>
+            <a:r>
+              <a:rPr>
+                <a:solidFill>
+                  <a:srgbClr val="003B4F"/>
+                </a:solidFill>
+                <a:latin typeface="Courier"/>
+              </a:rPr>
+              <a:t>    </a:t>
+            </a:r>
+            <a:r>
+              <a:rPr>
+                <a:solidFill>
+                  <a:srgbClr val="20794D"/>
+                </a:solidFill>
+                <a:latin typeface="Courier"/>
+              </a:rPr>
+              <a:t>" Median ="</a:t>
+            </a:r>
+            <a:r>
+              <a:rPr>
+                <a:solidFill>
+                  <a:srgbClr val="003B4F"/>
+                </a:solidFill>
+                <a:latin typeface="Courier"/>
+              </a:rPr>
+              <a:t>, </a:t>
+            </a:r>
+            <a:r>
+              <a:rPr>
+                <a:solidFill>
+                  <a:srgbClr val="4758AB"/>
+                </a:solidFill>
+                <a:latin typeface="Courier"/>
+              </a:rPr>
+              <a:t>round</a:t>
+            </a:r>
+            <a:r>
+              <a:rPr>
+                <a:solidFill>
+                  <a:srgbClr val="003B4F"/>
+                </a:solidFill>
+                <a:latin typeface="Courier"/>
+              </a:rPr>
+              <a:t>(med_l, </a:t>
+            </a:r>
+            <a:r>
+              <a:rPr>
+                <a:solidFill>
+                  <a:srgbClr val="AD0000"/>
+                </a:solidFill>
+                <a:latin typeface="Courier"/>
+              </a:rPr>
+              <a:t>2</a:t>
+            </a:r>
+            <a:r>
+              <a:rPr>
+                <a:solidFill>
+                  <a:srgbClr val="003B4F"/>
+                </a:solidFill>
+                <a:latin typeface="Courier"/>
+              </a:rPr>
+              <a:t>),</a:t>
+            </a:r>
+            <a:br/>
+            <a:r>
+              <a:rPr>
+                <a:solidFill>
+                  <a:srgbClr val="003B4F"/>
+                </a:solidFill>
+                <a:latin typeface="Courier"/>
+              </a:rPr>
+              <a:t>    </a:t>
+            </a:r>
+            <a:r>
+              <a:rPr>
+                <a:solidFill>
+                  <a:srgbClr val="20794D"/>
+                </a:solidFill>
+                <a:latin typeface="Courier"/>
+              </a:rPr>
+              <a:t>" SD ="</a:t>
+            </a:r>
+            <a:r>
+              <a:rPr>
+                <a:solidFill>
+                  <a:srgbClr val="003B4F"/>
+                </a:solidFill>
+                <a:latin typeface="Courier"/>
+              </a:rPr>
+              <a:t>, </a:t>
+            </a:r>
+            <a:r>
+              <a:rPr>
+                <a:solidFill>
+                  <a:srgbClr val="4758AB"/>
+                </a:solidFill>
+                <a:latin typeface="Courier"/>
+              </a:rPr>
+              <a:t>round</a:t>
+            </a:r>
+            <a:r>
+              <a:rPr>
+                <a:solidFill>
+                  <a:srgbClr val="003B4F"/>
+                </a:solidFill>
+                <a:latin typeface="Courier"/>
+              </a:rPr>
+              <a:t>(sd_l, </a:t>
+            </a:r>
+            <a:r>
+              <a:rPr>
+                <a:solidFill>
+                  <a:srgbClr val="AD0000"/>
+                </a:solidFill>
+                <a:latin typeface="Courier"/>
+              </a:rPr>
+              <a:t>2</a:t>
+            </a:r>
+            <a:r>
+              <a:rPr>
+                <a:solidFill>
+                  <a:srgbClr val="003B4F"/>
+                </a:solidFill>
+                <a:latin typeface="Courier"/>
+              </a:rPr>
+              <a:t>), </a:t>
+            </a:r>
+            <a:r>
+              <a:rPr>
+                <a:solidFill>
+                  <a:srgbClr val="20794D"/>
+                </a:solidFill>
+                <a:latin typeface="Courier"/>
+              </a:rPr>
+              <a:t>" SE ="</a:t>
+            </a:r>
+            <a:r>
+              <a:rPr>
+                <a:solidFill>
+                  <a:srgbClr val="003B4F"/>
+                </a:solidFill>
+                <a:latin typeface="Courier"/>
+              </a:rPr>
+              <a:t>, </a:t>
+            </a:r>
+            <a:r>
+              <a:rPr>
+                <a:solidFill>
+                  <a:srgbClr val="4758AB"/>
+                </a:solidFill>
+                <a:latin typeface="Courier"/>
+              </a:rPr>
+              <a:t>round</a:t>
+            </a:r>
+            <a:r>
+              <a:rPr>
+                <a:solidFill>
+                  <a:srgbClr val="003B4F"/>
+                </a:solidFill>
+                <a:latin typeface="Courier"/>
+              </a:rPr>
+              <a:t>(se_l, </a:t>
+            </a:r>
+            <a:r>
+              <a:rPr>
+                <a:solidFill>
+                  <a:srgbClr val="AD0000"/>
+                </a:solidFill>
+                <a:latin typeface="Courier"/>
+              </a:rPr>
+              <a:t>2</a:t>
+            </a:r>
+            <a:r>
+              <a:rPr>
+                <a:solidFill>
+                  <a:srgbClr val="003B4F"/>
+                </a:solidFill>
+                <a:latin typeface="Courier"/>
+              </a:rPr>
+              <a:t>), </a:t>
+            </a:r>
+            <a:r>
+              <a:rPr>
+                <a:solidFill>
+                  <a:srgbClr val="20794D"/>
+                </a:solidFill>
+                <a:latin typeface="Courier"/>
+              </a:rPr>
+              <a:t>"</a:t>
+            </a:r>
+            <a:r>
+              <a:rPr>
+                <a:solidFill>
+                  <a:srgbClr val="5E5E5E"/>
+                </a:solidFill>
+                <a:latin typeface="Courier"/>
+              </a:rPr>
+              <a:t>\n</a:t>
+            </a:r>
+            <a:r>
+              <a:rPr>
+                <a:solidFill>
+                  <a:srgbClr val="20794D"/>
+                </a:solidFill>
+                <a:latin typeface="Courier"/>
+              </a:rPr>
+              <a:t>"</a:t>
+            </a:r>
+            <a:r>
+              <a:rPr>
+                <a:solidFill>
+                  <a:srgbClr val="003B4F"/>
+                </a:solidFill>
+                <a:latin typeface="Courier"/>
+              </a:rPr>
+              <a:t>)</a:t>
             </a:r>
           </a:p>
           <a:p>
@@ -7433,77 +9013,24 @@
             </a:r>
             <a:r>
               <a:rPr/>
-              <a:t> Do the </a:t>
-            </a:r>
-            <a:r>
-              <a:rPr>
-                <a:latin typeface="Courier"/>
-              </a:rPr>
-              <a:t>mean_mm</a:t>
+              <a:t> Copy this block and adapt it to compute the same five numbers for </a:t>
+            </a:r>
+            <a:r>
+              <a:rPr>
+                <a:latin typeface="Courier"/>
+              </a:rPr>
+              <a:t>wind_lengths</a:t>
             </a:r>
             <a:r>
               <a:rPr/>
-              <a:t> and </a:t>
-            </a:r>
-            <a:r>
-              <a:rPr>
-                <a:latin typeface="Courier"/>
-              </a:rPr>
-              <a:t>se_mm</a:t>
-            </a:r>
-            <a:r>
-              <a:rPr/>
-              <a:t> values match the ones you calculated by hand in Parts 2 and 5? </a:t>
-            </a:r>
-            <a:r>
-              <a:rPr>
-                <a:latin typeface="Courier"/>
-              </a:rPr>
-              <a:t>Y / N</a:t>
-            </a:r>
-          </a:p>
-          <a:p>
-            <a:pPr lvl="0" indent="0" marL="0">
+              <a:t>.</a:t>
+            </a:r>
+          </a:p>
+          <a:p>
+            <a:pPr lvl="0" indent="0">
               <a:buNone/>
             </a:pPr>
             <a:r>
-              <a:rPr/>
-              <a:t>✏️ </a:t>
-            </a:r>
-            <a:r>
-              <a:rPr b="1"/>
-              <a:t>Your turn:</a:t>
-            </a:r>
-            <a:r>
-              <a:rPr/>
-              <a:t> Now group by </a:t>
-            </a:r>
-            <a:r>
-              <a:rPr>
-                <a:latin typeface="Courier"/>
-              </a:rPr>
-              <a:t>group</a:t>
-            </a:r>
-            <a:r>
-              <a:rPr/>
-              <a:t> (the field team) instead of </a:t>
-            </a:r>
-            <a:r>
-              <a:rPr>
-                <a:latin typeface="Courier"/>
-              </a:rPr>
-              <a:t>n_s</a:t>
-            </a:r>
-            <a:r>
-              <a:rPr/>
-              <a:t>, and compute the same five statistics.</a:t>
-            </a:r>
-          </a:p>
-          <a:p>
-            <a:pPr lvl="0" indent="0">
-              <a:buNone/>
-            </a:pPr>
-            <a:r>
               <a:rPr>
                 <a:solidFill>
                   <a:srgbClr val="5E5E5E"/>
@@ -7511,66 +9038,6 @@
                 <a:latin typeface="Courier"/>
               </a:rPr>
               <a:t># Write your code here:</a:t>
-            </a:r>
-          </a:p>
-          <a:p>
-            <a:pPr lvl="0" indent="0" marL="1270000">
-              <a:buNone/>
-            </a:pPr>
-            <a:r>
-              <a:rPr sz="2000" b="1"/>
-              <a:t>Tip</a:t>
-            </a:r>
-          </a:p>
-          <a:p>
-            <a:pPr lvl="0" indent="0" marL="1270000">
-              <a:buNone/>
-            </a:pPr>
-            <a:r>
-              <a:rPr sz="2000" b="1"/>
-              <a:t>🚀 If you finish early:</a:t>
-            </a:r>
-            <a:r>
-              <a:rPr sz="2000"/>
-              <a:t> Group by </a:t>
-            </a:r>
-            <a:r>
-              <a:rPr sz="2000" i="1"/>
-              <a:t>both</a:t>
-            </a:r>
-            <a:r>
-              <a:rPr sz="2000"/>
-              <a:t> </a:t>
-            </a:r>
-            <a:r>
-              <a:rPr sz="2000">
-                <a:latin typeface="Courier"/>
-              </a:rPr>
-              <a:t>group</a:t>
-            </a:r>
-            <a:r>
-              <a:rPr sz="2000"/>
-              <a:t> and </a:t>
-            </a:r>
-            <a:r>
-              <a:rPr sz="2000">
-                <a:latin typeface="Courier"/>
-              </a:rPr>
-              <a:t>n_s</a:t>
-            </a:r>
-            <a:r>
-              <a:rPr sz="2000"/>
-              <a:t> at once (</a:t>
-            </a:r>
-            <a:r>
-              <a:rPr sz="2000">
-                <a:latin typeface="Courier"/>
-              </a:rPr>
-              <a:t>group_by(group, n_s)</a:t>
-            </a:r>
-            <a:r>
-              <a:rPr sz="2000"/>
-              <a:t>). How many rows does the result have, and why?</a:t>
             </a:r>
           </a:p>
         </p:txBody>

--- a/docs/content/descriptive_stats/descriptive_stats_activity.pptx
+++ b/docs/content/descriptive_stats/descriptive_stats_activity.pptx
@@ -3307,7 +3307,7 @@
             </a:pPr>
             <a:r>
               <a:rPr/>
-              <a:t>Describing Your Data</a:t>
+              <a:t>Activity: Describing Your Data</a:t>
             </a:r>
           </a:p>
         </p:txBody>
@@ -4528,7 +4528,7 @@
             </a:r>
             <a:r>
               <a:rPr/>
-              <a:t> from Module 2</a:t>
+              <a:t> from Wrangling Your Data</a:t>
             </a:r>
           </a:p>
         </p:txBody>
@@ -6018,7 +6018,7 @@
             </a:pPr>
             <a:r>
               <a:rPr/>
-              <a:t>Worksheet 3: Describing Your Data</a:t>
+              <a:t>Worksheet: Describing Your Data</a:t>
             </a:r>
           </a:p>
         </p:txBody>

--- a/docs/content/descriptive_stats/descriptive_stats_activity.pptx
+++ b/docs/content/descriptive_stats/descriptive_stats_activity.pptx
@@ -6245,7 +6245,7 @@
                 </a:solidFill>
                 <a:latin typeface="Courier"/>
               </a:rPr>
-              <a:t>lee_lengths  &lt;- pine_df </a:t>
+              <a:t>shady_lengths  &lt;- pine_df </a:t>
             </a:r>
             <a:r>
               <a:rPr>
@@ -6363,7 +6363,7 @@
                 </a:solidFill>
                 <a:latin typeface="Courier"/>
               </a:rPr>
-              <a:t>wind_lengths &lt;- pine_df </a:t>
+              <a:t>sunny_lengths &lt;- pine_df </a:t>
             </a:r>
             <a:r>
               <a:rPr>
@@ -6494,7 +6494,7 @@
               <a:rPr>
                 <a:latin typeface="Courier"/>
               </a:rPr>
-              <a:t>lee_lengths</a:t>
+              <a:t>shady_lengths</a:t>
             </a:r>
             <a:r>
               <a:rPr/>
@@ -6504,7 +6504,7 @@
               <a:rPr>
                 <a:latin typeface="Courier"/>
               </a:rPr>
-              <a:t>wind_lengths</a:t>
+              <a:t>sunny_lengths</a:t>
             </a:r>
             <a:r>
               <a:rPr/>
@@ -6614,7 +6614,7 @@
                 </a:solidFill>
                 <a:latin typeface="Courier"/>
               </a:rPr>
-              <a:t>(lee_lengths)</a:t>
+              <a:t>(shady_lengths)</a:t>
             </a:r>
             <a:br/>
             <a:r>
@@ -6633,7 +6633,7 @@
                 </a:solidFill>
                 <a:latin typeface="Courier"/>
               </a:rPr>
-              <a:t>(lee_lengths)</a:t>
+              <a:t>(shady_lengths)</a:t>
             </a:r>
             <a:br/>
             <a:br/>
@@ -6653,7 +6653,7 @@
                 </a:solidFill>
                 <a:latin typeface="Courier"/>
               </a:rPr>
-              <a:t>(wind_lengths)</a:t>
+              <a:t>(sunny_lengths)</a:t>
             </a:r>
             <a:br/>
             <a:r>
@@ -6672,7 +6672,7 @@
                 </a:solidFill>
                 <a:latin typeface="Courier"/>
               </a:rPr>
-              <a:t>(wind_lengths)</a:t>
+              <a:t>(sunny_lengths)</a:t>
             </a:r>
           </a:p>
           <a:p>
@@ -6700,8 +6700,8 @@
               <a:rPr>
                 <a:latin typeface="Courier"/>
               </a:rPr>
-              <a:t>Lee   — mean vs. median: ________________________
-Wind  — mean vs. median: ________________________</a:t>
+              <a:t>Shady — mean vs. median: ________________________
+Sunny — mean vs. median: ________________________</a:t>
             </a:r>
           </a:p>
         </p:txBody>
@@ -6801,7 +6801,7 @@
                 </a:solidFill>
                 <a:latin typeface="Courier"/>
               </a:rPr>
-              <a:t>(lee_lengths)</a:t>
+              <a:t>(shady_lengths)</a:t>
             </a:r>
             <a:br/>
             <a:r>
@@ -6820,7 +6820,7 @@
                 </a:solidFill>
                 <a:latin typeface="Courier"/>
               </a:rPr>
-              <a:t>(lee_lengths)</a:t>
+              <a:t>(shady_lengths)</a:t>
             </a:r>
             <a:br/>
             <a:br/>
@@ -6840,7 +6840,7 @@
                 </a:solidFill>
                 <a:latin typeface="Courier"/>
               </a:rPr>
-              <a:t>(wind_lengths)</a:t>
+              <a:t>(sunny_lengths)</a:t>
             </a:r>
             <a:br/>
             <a:r>
@@ -6859,7 +6859,7 @@
                 </a:solidFill>
                 <a:latin typeface="Courier"/>
               </a:rPr>
-              <a:t>(wind_lengths)</a:t>
+              <a:t>(sunny_lengths)</a:t>
             </a:r>
           </a:p>
           <a:p>
@@ -6876,7 +6876,7 @@
             </a:r>
             <a:r>
               <a:rPr/>
-              <a:t> Which side has more spread in its needle lengths — lee or windward? How do you know? </a:t>
+              <a:t> Which side has more spread in its needle lengths — shady or sunny? How do you know? </a:t>
             </a:r>
             <a:r>
               <a:rPr>
@@ -6982,7 +6982,7 @@
                 </a:solidFill>
                 <a:latin typeface="Courier"/>
               </a:rPr>
-              <a:t>(lee_lengths)</a:t>
+              <a:t>(shady_lengths)</a:t>
             </a:r>
             <a:br/>
             <a:r>
@@ -7001,7 +7001,7 @@
                 </a:solidFill>
                 <a:latin typeface="Courier"/>
               </a:rPr>
-              <a:t>(lee_lengths) </a:t>
+              <a:t>(shady_lengths) </a:t>
             </a:r>
             <a:r>
               <a:rPr>
@@ -7037,7 +7037,7 @@
                 </a:solidFill>
                 <a:latin typeface="Courier"/>
               </a:rPr>
-              <a:t>(lee_lengths)</a:t>
+              <a:t>(shady_lengths)</a:t>
             </a:r>
             <a:br/>
             <a:br/>
@@ -7057,7 +7057,7 @@
                 </a:solidFill>
                 <a:latin typeface="Courier"/>
               </a:rPr>
-              <a:t>(lee_lengths)</a:t>
+              <a:t>(shady_lengths)</a:t>
             </a:r>
             <a:br/>
             <a:r>
@@ -7076,7 +7076,7 @@
                 </a:solidFill>
                 <a:latin typeface="Courier"/>
               </a:rPr>
-              <a:t>(lee_lengths)</a:t>
+              <a:t>(shady_lengths)</a:t>
             </a:r>
           </a:p>
           <a:p>
@@ -7099,7 +7099,7 @@
               <a:rPr>
                 <a:latin typeface="Courier"/>
               </a:rPr>
-              <a:t>wind_lengths</a:t>
+              <a:t>sunny_lengths</a:t>
             </a:r>
             <a:r>
               <a:rPr/>
@@ -7156,7 +7156,7 @@
               <a:rPr sz="2000">
                 <a:latin typeface="Courier"/>
               </a:rPr>
-              <a:t>IQR(lee_lengths)</a:t>
+              <a:t>IQR(shady_lengths)</a:t>
             </a:r>
             <a:r>
               <a:rPr sz="2000"/>
@@ -7166,7 +7166,7 @@
               <a:rPr sz="2000">
                 <a:latin typeface="Courier"/>
               </a:rPr>
-              <a:t>quantile(lee_lengths, 0.75) - quantile(lee_lengths, 0.25)</a:t>
+              <a:t>quantile(shady_lengths, 0.75) - quantile(shady_lengths, 0.25)</a:t>
             </a:r>
             <a:r>
               <a:rPr sz="2000"/>
@@ -8034,7 +8034,7 @@
                 </a:solidFill>
                 <a:latin typeface="Courier"/>
               </a:rPr>
-              <a:t>n_lee  &lt;- </a:t>
+              <a:t>n_shady  &lt;- </a:t>
             </a:r>
             <a:r>
               <a:rPr>
@@ -8079,7 +8079,7 @@
                 </a:solidFill>
                 <a:latin typeface="Courier"/>
               </a:rPr>
-              <a:t>(lee_lengths))</a:t>
+              <a:t>(shady_lengths))</a:t>
             </a:r>
             <a:br/>
             <a:r>
@@ -8089,7 +8089,7 @@
                 </a:solidFill>
                 <a:latin typeface="Courier"/>
               </a:rPr>
-              <a:t>n_wind &lt;- </a:t>
+              <a:t>n_sunny &lt;- </a:t>
             </a:r>
             <a:r>
               <a:rPr>
@@ -8134,7 +8134,7 @@
                 </a:solidFill>
                 <a:latin typeface="Courier"/>
               </a:rPr>
-              <a:t>(wind_lengths))</a:t>
+              <a:t>(sunny_lengths))</a:t>
             </a:r>
             <a:br/>
             <a:br/>
@@ -8145,7 +8145,7 @@
                 </a:solidFill>
                 <a:latin typeface="Courier"/>
               </a:rPr>
-              <a:t>se_lee  &lt;- </a:t>
+              <a:t>se_shady  &lt;- </a:t>
             </a:r>
             <a:r>
               <a:rPr>
@@ -8163,7 +8163,7 @@
                 </a:solidFill>
                 <a:latin typeface="Courier"/>
               </a:rPr>
-              <a:t>(lee_lengths)  </a:t>
+              <a:t>(shady_lengths)  </a:t>
             </a:r>
             <a:r>
               <a:rPr>
@@ -8199,7 +8199,7 @@
                 </a:solidFill>
                 <a:latin typeface="Courier"/>
               </a:rPr>
-              <a:t>(n_lee)</a:t>
+              <a:t>(n_shady)</a:t>
             </a:r>
             <a:br/>
             <a:r>
@@ -8209,7 +8209,7 @@
                 </a:solidFill>
                 <a:latin typeface="Courier"/>
               </a:rPr>
-              <a:t>se_wind &lt;- </a:t>
+              <a:t>se_sunny &lt;- </a:t>
             </a:r>
             <a:r>
               <a:rPr>
@@ -8227,7 +8227,7 @@
                 </a:solidFill>
                 <a:latin typeface="Courier"/>
               </a:rPr>
-              <a:t>(wind_lengths) </a:t>
+              <a:t>(sunny_lengths) </a:t>
             </a:r>
             <a:r>
               <a:rPr>
@@ -8263,7 +8263,7 @@
                 </a:solidFill>
                 <a:latin typeface="Courier"/>
               </a:rPr>
-              <a:t>(n_wind)</a:t>
+              <a:t>(n_sunny)</a:t>
             </a:r>
             <a:br/>
             <a:br/>
@@ -8274,7 +8274,7 @@
                 </a:solidFill>
                 <a:latin typeface="Courier"/>
               </a:rPr>
-              <a:t>se_lee</a:t>
+              <a:t>se_shady</a:t>
             </a:r>
             <a:br/>
             <a:r>
@@ -8284,7 +8284,7 @@
                 </a:solidFill>
                 <a:latin typeface="Courier"/>
               </a:rPr>
-              <a:t>se_wind</a:t>
+              <a:t>se_sunny</a:t>
             </a:r>
           </a:p>
           <a:p>
@@ -8448,7 +8448,7 @@
                 </a:solidFill>
                 <a:latin typeface="Courier"/>
               </a:rPr>
-              <a:t>(lee_lengths))</a:t>
+              <a:t>(shady_lengths))</a:t>
             </a:r>
             <a:br/>
             <a:r>
@@ -8476,7 +8476,7 @@
                 </a:solidFill>
                 <a:latin typeface="Courier"/>
               </a:rPr>
-              <a:t>(lee_lengths, </a:t>
+              <a:t>(shady_lengths, </a:t>
             </a:r>
             <a:r>
               <a:rPr>
@@ -8540,7 +8540,7 @@
                 </a:solidFill>
                 <a:latin typeface="Courier"/>
               </a:rPr>
-              <a:t>(lee_lengths, </a:t>
+              <a:t>(shady_lengths, </a:t>
             </a:r>
             <a:r>
               <a:rPr>
@@ -8604,7 +8604,7 @@
                 </a:solidFill>
                 <a:latin typeface="Courier"/>
               </a:rPr>
-              <a:t>(lee_lengths, </a:t>
+              <a:t>(shady_lengths, </a:t>
             </a:r>
             <a:r>
               <a:rPr>
@@ -9019,7 +9019,7 @@
               <a:rPr>
                 <a:latin typeface="Courier"/>
               </a:rPr>
-              <a:t>wind_lengths</a:t>
+              <a:t>sunny_lengths</a:t>
             </a:r>
             <a:r>
               <a:rPr/>

--- a/docs/content/descriptive_stats/descriptive_stats_activity.pptx
+++ b/docs/content/descriptive_stats/descriptive_stats_activity.pptx
@@ -3524,8 +3524,10 @@
             </a:r>
             <a:r>
               <a:rPr/>
-              <a:t> output. Do its mean and SD match what you calculated by hand in Parts 2 and 3? </a:t>
-            </a:r>
+              <a:t> output. Do its mean and SD match what you calculated by hand in Parts 2 and 3?</a:t>
+            </a:r>
+            <a:br/>
+            <a:br/>
             <a:r>
               <a:rPr>
                 <a:latin typeface="Courier"/>
@@ -3577,13 +3579,14 @@
             </a:r>
             <a:r>
               <a:rPr/>
-              <a:t>) that it doesn’t show for a numeric one? </a:t>
-            </a:r>
-            <a:r>
-              <a:rPr>
-                <a:latin typeface="Courier"/>
-              </a:rPr>
-              <a:t>________________________</a:t>
+              <a:t>) that it doesn’t show for a numeric one?</a:t>
+            </a:r>
+            <a:br/>
+            <a:r>
+              <a:rPr>
+                <a:latin typeface="Courier"/>
+              </a:rPr>
+              <a:t>____________________________________</a:t>
             </a:r>
           </a:p>
         </p:txBody>
@@ -4349,8 +4352,13 @@
             </a:r>
             <a:r>
               <a:rPr/>
-              <a:t> values match the ones you calculated by hand in Parts 2 and 5? </a:t>
-            </a:r>
+              <a:t> values match the ones you calculated by hand in Parts 2 and 5?</a:t>
+            </a:r>
+          </a:p>
+          <a:p>
+            <a:pPr lvl="0" indent="0" marL="0">
+              <a:buNone/>
+            </a:pPr>
             <a:r>
               <a:rPr>
                 <a:latin typeface="Courier"/>
@@ -4408,6 +4416,8 @@
               </a:rPr>
               <a:t># Write your code here:</a:t>
             </a:r>
+            <a:br/>
+            <a:br/>
           </a:p>
           <a:p>
             <a:pPr lvl="0" indent="0" marL="1270000">
@@ -5366,13 +5376,20 @@
             </a:r>
             <a:r>
               <a:rPr/>
-              <a:t>? Does that match what you’d expect from the cutoffs (16 and 20)? </a:t>
-            </a:r>
-            <a:r>
-              <a:rPr>
-                <a:latin typeface="Courier"/>
-              </a:rPr>
-              <a:t>________________________</a:t>
+              <a:t>?</a:t>
+            </a:r>
+            <a:br/>
+            <a:r>
+              <a:rPr/>
+              <a:t>Does that match what you’d expect from the cutoffs (16 and 20)?</a:t>
+            </a:r>
+            <a:br/>
+            <a:br/>
+            <a:r>
+              <a:rPr>
+                <a:latin typeface="Courier"/>
+              </a:rPr>
+              <a:t>__________________________________________________________________</a:t>
             </a:r>
           </a:p>
         </p:txBody>
@@ -5717,7 +5734,13 @@
             </a:r>
             <a:r>
               <a:rPr/>
-              <a:t> Run your whole script top to bottom. Ran cleanly? </a:t>
+              <a:t> Run your whole script top to bottom.</a:t>
+            </a:r>
+            <a:br/>
+            <a:br/>
+            <a:r>
+              <a:rPr/>
+              <a:t>Ran cleanly? </a:t>
             </a:r>
             <a:r>
               <a:rPr>
@@ -5725,9 +5748,11 @@
               </a:rPr>
               <a:t>Y / N</a:t>
             </a:r>
+            <a:br/>
+            <a:br/>
             <a:r>
               <a:rPr/>
-              <a:t> — if not, the error was: </a:t>
+              <a:t>— if not, the error was: </a:t>
             </a:r>
             <a:r>
               <a:rPr>
@@ -6498,7 +6523,19 @@
             </a:r>
             <a:r>
               <a:rPr/>
-              <a:t>? In </a:t>
+              <a:t>? </a:t>
+            </a:r>
+            <a:r>
+              <a:rPr>
+                <a:latin typeface="Courier"/>
+              </a:rPr>
+              <a:t>________________________</a:t>
+            </a:r>
+            <a:br/>
+            <a:br/>
+            <a:r>
+              <a:rPr/>
+              <a:t>In </a:t>
             </a:r>
             <a:r>
               <a:rPr>
@@ -6700,7 +6737,8 @@
               <a:rPr>
                 <a:latin typeface="Courier"/>
               </a:rPr>
-              <a:t>Shady — mean vs. median: ________________________
+              <a:t>
+Shady — mean vs. median: ________________________
 Sunny — mean vs. median: ________________________</a:t>
             </a:r>
           </a:p>
@@ -6876,13 +6914,20 @@
             </a:r>
             <a:r>
               <a:rPr/>
-              <a:t> Which side has more spread in its needle lengths — shady or sunny? How do you know? </a:t>
-            </a:r>
-            <a:r>
-              <a:rPr>
-                <a:latin typeface="Courier"/>
-              </a:rPr>
-              <a:t>________________________</a:t>
+              <a:t> Which side has more spread in its needle lengths — shady or sunny?</a:t>
+            </a:r>
+            <a:br/>
+            <a:r>
+              <a:rPr/>
+              <a:t>How do you know?</a:t>
+            </a:r>
+            <a:br/>
+            <a:br/>
+            <a:r>
+              <a:rPr>
+                <a:latin typeface="Courier"/>
+              </a:rPr>
+              <a:t>______________________________________________________________________</a:t>
             </a:r>
           </a:p>
         </p:txBody>
@@ -7119,6 +7164,8 @@
               </a:rPr>
               <a:t># Write your code here:</a:t>
             </a:r>
+            <a:br/>
+            <a:br/>
           </a:p>
           <a:p>
             <a:pPr lvl="0" indent="0">
@@ -7128,7 +7175,8 @@
               <a:rPr>
                 <a:latin typeface="Courier"/>
               </a:rPr>
-              <a:t>Wider IQR: ________________________</a:t>
+              <a:t>
+Wider IQR: ________________________</a:t>
             </a:r>
           </a:p>
           <a:p>
@@ -7520,7 +7568,8 @@
               <a:rPr>
                 <a:latin typeface="Courier"/>
               </a:rPr>
-              <a:t>________________________________________________________</a:t>
+              <a:t>
+________________________________________________________</a:t>
             </a:r>
           </a:p>
           <a:p>
@@ -8312,7 +8361,8 @@
               <a:rPr>
                 <a:latin typeface="Courier"/>
               </a:rPr>
-              <a:t>________________________________________________________</a:t>
+              <a:t>
+________________________________________________________</a:t>
             </a:r>
           </a:p>
         </p:txBody>
@@ -9039,6 +9089,8 @@
               </a:rPr>
               <a:t># Write your code here:</a:t>
             </a:r>
+            <a:br/>
+            <a:br/>
           </a:p>
         </p:txBody>
       </p:sp>
